--- a/docs/pitch-deck/AI-Document-Intelligence-Pitch.pptx
+++ b/docs/pitch-deck/AI-Document-Intelligence-Pitch.pptx
@@ -4,6 +4,9 @@
   <p:sldMasterIdLst>
     <p:sldMasterId id="2147483648" r:id="rId1"/>
   </p:sldMasterIdLst>
+  <p:notesMasterIdLst>
+    <p:notesMasterId r:id="rId9"/>
+  </p:notesMasterIdLst>
   <p:sldIdLst>
     <p:sldId id="256" r:id="rId2"/>
     <p:sldId id="257" r:id="rId3"/>
@@ -13,10 +16,7 @@
     <p:sldId id="261" r:id="rId7"/>
     <p:sldId id="262" r:id="rId8"/>
   </p:sldIdLst>
-  <p:notesMasterIdLst>
-    <p:notesMasterId r:id="rId9"/>
-  </p:notesMasterIdLst>
-  <p:sldSz cx="9144000" cy="5143500"/>
+  <p:sldSz cx="9144000" cy="5143500" type="screen16x9"/>
   <p:notesSz cx="5143500" cy="9144000"/>
   <p:defaultTextStyle>
     <a:lvl1pPr marL="0" algn="l" defTabSz="914400" rtl="0" eaLnBrk="1" latinLnBrk="0" hangingPunct="1">
@@ -110,6 +110,11 @@
       </a:defRPr>
     </a:lvl9pPr>
   </p:defaultTextStyle>
+  <p:extLst>
+    <p:ext uri="{EFAFB233-063F-42B5-8137-9DF3F51BA10A}">
+      <p15:sldGuideLst xmlns:p15="http://schemas.microsoft.com/office/powerpoint/2012/main"/>
+    </p:ext>
+  </p:extLst>
 </p:presentation>
 </file>
 
@@ -135,234 +140,10 @@
           <a:chExt cx="0" cy="0"/>
         </a:xfrm>
       </p:grpSpPr>
-      <p:sp>
-        <p:nvSpPr>
-          <p:cNvPr id="2" name="Header Placeholder 1"/>
-          <p:cNvSpPr>
-            <a:spLocks noGrp="1"/>
-          </p:cNvSpPr>
-          <p:nvPr>
-            <p:ph type="hdr" sz="quarter"/>
-          </p:nvPr>
-        </p:nvSpPr>
-        <p:spPr>
-          <a:xfrm>
-            <a:off x="0" y="0"/>
-            <a:ext cx="2971800" cy="458788"/>
-          </a:xfrm>
-          <a:prstGeom prst="rect">
-            <a:avLst/>
-          </a:prstGeom>
-        </p:spPr>
-        <p:txBody>
-          <a:bodyPr vert="horz" lIns="91440" tIns="45720" rIns="91440" bIns="45720" rtlCol="0"/>
-          <a:lstStyle>
-            <a:lvl1pPr algn="l">
-              <a:defRPr sz="1200"/>
-            </a:lvl1pPr>
-          </a:lstStyle>
-          <a:p>
-            <a:endParaRPr lang="en-US"/>
-          </a:p>
-        </p:txBody>
-      </p:sp>
-      <p:sp>
-        <p:nvSpPr>
-          <p:cNvPr id="3" name="Date Placeholder 2"/>
-          <p:cNvSpPr>
-            <a:spLocks noGrp="1"/>
-          </p:cNvSpPr>
-          <p:nvPr>
-            <p:ph type="dt" idx="1"/>
-          </p:nvPr>
-        </p:nvSpPr>
-        <p:spPr>
-          <a:xfrm>
-            <a:off x="3884613" y="0"/>
-            <a:ext cx="2971800" cy="458788"/>
-          </a:xfrm>
-          <a:prstGeom prst="rect">
-            <a:avLst/>
-          </a:prstGeom>
-        </p:spPr>
-        <p:txBody>
-          <a:bodyPr vert="horz" lIns="91440" tIns="45720" rIns="91440" bIns="45720" rtlCol="0"/>
-          <a:lstStyle>
-            <a:lvl1pPr algn="r">
-              <a:defRPr sz="1200"/>
-            </a:lvl1pPr>
-          </a:lstStyle>
-          <a:p>
-            <a:fld id="{5282F153-3F37-0F45-9E97-73ACFA13230C}" type="datetimeFigureOut">
-              <a:rPr lang="en-US"/>
-              <a:t>7/23/19</a:t>
-            </a:fld>
-            <a:endParaRPr lang="en-US"/>
-          </a:p>
-        </p:txBody>
-      </p:sp>
-      <p:sp>
-        <p:nvSpPr>
-          <p:cNvPr id="4" name="Slide Image Placeholder 3"/>
-          <p:cNvSpPr>
-            <a:spLocks noGrp="1" noRot="1" noChangeAspect="1"/>
-          </p:cNvSpPr>
-          <p:nvPr>
-            <p:ph type="sldImg" idx="2"/>
-          </p:nvPr>
-        </p:nvSpPr>
-        <p:spPr>
-          <a:xfrm>
-            <a:off x="685800" y="1143000"/>
-            <a:ext cx="5486400" cy="3086100"/>
-          </a:xfrm>
-          <a:prstGeom prst="rect">
-            <a:avLst/>
-          </a:prstGeom>
-          <a:noFill/>
-          <a:ln w="12700">
-            <a:solidFill>
-              <a:prstClr val="black"/>
-            </a:solidFill>
-          </a:ln>
-        </p:spPr>
-        <p:txBody>
-          <a:bodyPr vert="horz" lIns="91440" tIns="45720" rIns="91440" bIns="45720" rtlCol="0" anchor="ctr"/>
-          <a:lstStyle/>
-          <a:p>
-            <a:endParaRPr lang="en-US"/>
-          </a:p>
-        </p:txBody>
-      </p:sp>
-      <p:sp>
-        <p:nvSpPr>
-          <p:cNvPr id="5" name="Notes Placeholder 4"/>
-          <p:cNvSpPr>
-            <a:spLocks noGrp="1"/>
-          </p:cNvSpPr>
-          <p:nvPr>
-            <p:ph type="body" sz="quarter" idx="3"/>
-          </p:nvPr>
-        </p:nvSpPr>
-        <p:spPr>
-          <a:xfrm>
-            <a:off x="685800" y="4400550"/>
-            <a:ext cx="5486400" cy="3600450"/>
-          </a:xfrm>
-          <a:prstGeom prst="rect">
-            <a:avLst/>
-          </a:prstGeom>
-        </p:spPr>
-        <p:txBody>
-          <a:bodyPr vert="horz" lIns="91440" tIns="45720" rIns="91440" bIns="45720" rtlCol="0"/>
-          <a:lstStyle/>
-          <a:p>
-            <a:pPr lvl="0"/>
-            <a:r>
-              <a:rPr lang="en-US"/>
-              <a:t>Click to edit Master text styles</a:t>
-            </a:r>
-          </a:p>
-          <a:p>
-            <a:pPr lvl="1"/>
-            <a:r>
-              <a:rPr lang="en-US"/>
-              <a:t>Second level</a:t>
-            </a:r>
-          </a:p>
-          <a:p>
-            <a:pPr lvl="2"/>
-            <a:r>
-              <a:rPr lang="en-US"/>
-              <a:t>Third level</a:t>
-            </a:r>
-          </a:p>
-          <a:p>
-            <a:pPr lvl="3"/>
-            <a:r>
-              <a:rPr lang="en-US"/>
-              <a:t>Fourth level</a:t>
-            </a:r>
-          </a:p>
-          <a:p>
-            <a:pPr lvl="4"/>
-            <a:r>
-              <a:rPr lang="en-US"/>
-              <a:t>Fifth level</a:t>
-            </a:r>
-          </a:p>
-        </p:txBody>
-      </p:sp>
-      <p:sp>
-        <p:nvSpPr>
-          <p:cNvPr id="6" name="Footer Placeholder 5"/>
-          <p:cNvSpPr>
-            <a:spLocks noGrp="1"/>
-          </p:cNvSpPr>
-          <p:nvPr>
-            <p:ph type="ftr" sz="quarter" idx="4"/>
-          </p:nvPr>
-        </p:nvSpPr>
-        <p:spPr>
-          <a:xfrm>
-            <a:off x="0" y="8685213"/>
-            <a:ext cx="2971800" cy="458787"/>
-          </a:xfrm>
-          <a:prstGeom prst="rect">
-            <a:avLst/>
-          </a:prstGeom>
-        </p:spPr>
-        <p:txBody>
-          <a:bodyPr vert="horz" lIns="91440" tIns="45720" rIns="91440" bIns="45720" rtlCol="0" anchor="b"/>
-          <a:lstStyle>
-            <a:lvl1pPr algn="l">
-              <a:defRPr sz="1200"/>
-            </a:lvl1pPr>
-          </a:lstStyle>
-          <a:p>
-            <a:endParaRPr lang="en-US"/>
-          </a:p>
-        </p:txBody>
-      </p:sp>
-      <p:sp>
-        <p:nvSpPr>
-          <p:cNvPr id="7" name="Slide Number Placeholder 6"/>
-          <p:cNvSpPr>
-            <a:spLocks noGrp="1"/>
-          </p:cNvSpPr>
-          <p:nvPr>
-            <p:ph type="sldNum" sz="quarter" idx="5"/>
-          </p:nvPr>
-        </p:nvSpPr>
-        <p:spPr>
-          <a:xfrm>
-            <a:off x="3884613" y="8685213"/>
-            <a:ext cx="2971800" cy="458787"/>
-          </a:xfrm>
-          <a:prstGeom prst="rect">
-            <a:avLst/>
-          </a:prstGeom>
-        </p:spPr>
-        <p:txBody>
-          <a:bodyPr vert="horz" lIns="91440" tIns="45720" rIns="91440" bIns="45720" rtlCol="0" anchor="b"/>
-          <a:lstStyle>
-            <a:lvl1pPr algn="r">
-              <a:defRPr sz="1200"/>
-            </a:lvl1pPr>
-          </a:lstStyle>
-          <a:p>
-            <a:fld id="{CE5E9CC1-C706-0F49-92D6-E571CC5EEA8F}" type="slidenum">
-              <a:rPr lang="en-US"/>
-              <a:t>‹#›</a:t>
-            </a:fld>
-            <a:endParaRPr lang="en-US"/>
-          </a:p>
-        </p:txBody>
-      </p:sp>
     </p:spTree>
     <p:extLst>
       <p:ext uri="{BB962C8B-B14F-4D97-AF65-F5344CB8AC3E}">
-        <p14:creationId xmlns:p14="http://schemas.microsoft.com/office/powerpoint/2010/main" val="1024086991"/>
+        <p14:creationId xmlns:p14="http://schemas.microsoft.com/office/powerpoint/2010/main" val="568119693"/>
       </p:ext>
     </p:extLst>
   </p:cSld>
@@ -506,10 +287,6 @@
           <a:bodyPr/>
           <a:lstStyle/>
           <a:p>
-            <a:r>
-              <a:rPr lang="en-US" dirty="0"/>
-              <a:t/>
-            </a:r>
             <a:endParaRPr lang="en-US" dirty="0"/>
           </a:p>
         </p:txBody>
@@ -594,10 +371,6 @@
           <a:bodyPr/>
           <a:lstStyle/>
           <a:p>
-            <a:r>
-              <a:rPr lang="en-US" dirty="0"/>
-              <a:t/>
-            </a:r>
             <a:endParaRPr lang="en-US" dirty="0"/>
           </a:p>
         </p:txBody>
@@ -682,10 +455,6 @@
           <a:bodyPr/>
           <a:lstStyle/>
           <a:p>
-            <a:r>
-              <a:rPr lang="en-US" dirty="0"/>
-              <a:t/>
-            </a:r>
             <a:endParaRPr lang="en-US" dirty="0"/>
           </a:p>
         </p:txBody>
@@ -770,10 +539,6 @@
           <a:bodyPr/>
           <a:lstStyle/>
           <a:p>
-            <a:r>
-              <a:rPr lang="en-US" dirty="0"/>
-              <a:t/>
-            </a:r>
             <a:endParaRPr lang="en-US" dirty="0"/>
           </a:p>
         </p:txBody>
@@ -858,10 +623,6 @@
           <a:bodyPr/>
           <a:lstStyle/>
           <a:p>
-            <a:r>
-              <a:rPr lang="en-US" dirty="0"/>
-              <a:t/>
-            </a:r>
             <a:endParaRPr lang="en-US" dirty="0"/>
           </a:p>
         </p:txBody>
@@ -946,10 +707,6 @@
           <a:bodyPr/>
           <a:lstStyle/>
           <a:p>
-            <a:r>
-              <a:rPr lang="en-US" dirty="0"/>
-              <a:t/>
-            </a:r>
             <a:endParaRPr lang="en-US" dirty="0"/>
           </a:p>
         </p:txBody>
@@ -1034,10 +791,6 @@
           <a:bodyPr/>
           <a:lstStyle/>
           <a:p>
-            <a:r>
-              <a:rPr lang="en-US" dirty="0"/>
-              <a:t/>
-            </a:r>
             <a:endParaRPr lang="en-US" dirty="0"/>
           </a:p>
         </p:txBody>
@@ -1111,6 +864,11 @@
 <file path=ppt/slideMasters/slideMaster1.xml><?xml version="1.0" encoding="utf-8"?>
 <p:sldMaster xmlns:a="http://schemas.openxmlformats.org/drawingml/2006/main" xmlns:r="http://schemas.openxmlformats.org/officeDocument/2006/relationships" xmlns:p="http://schemas.openxmlformats.org/presentationml/2006/main">
   <p:cSld>
+    <p:bg>
+      <p:bgRef idx="1001">
+        <a:schemeClr val="bg1"/>
+      </p:bgRef>
+    </p:bg>
     <p:spTree>
       <p:nvGrpSpPr>
         <p:cNvPr id="1" name=""/>
@@ -1393,6 +1151,7 @@
         <a:solidFill>
           <a:srgbClr val="1B2A4A"/>
         </a:solidFill>
+        <a:effectLst/>
       </p:bgPr>
     </p:bg>
     <p:spTree>
@@ -1428,6 +1187,13 @@
           </a:solidFill>
           <a:ln/>
         </p:spPr>
+        <p:txBody>
+          <a:bodyPr/>
+          <a:lstStyle/>
+          <a:p>
+            <a:endParaRPr lang="en-US"/>
+          </a:p>
+        </p:txBody>
       </p:sp>
       <p:sp>
         <p:nvSpPr>
@@ -1450,7 +1216,7 @@
           <a:bodyPr wrap="square" lIns="0" tIns="0" rIns="0" bIns="0" rtlCol="0" anchor="ctr"/>
           <a:lstStyle/>
           <a:p>
-            <a:pPr indent="0" marL="0">
+            <a:pPr marL="0" indent="0">
               <a:buNone/>
             </a:pPr>
             <a:r>
@@ -1489,7 +1255,7 @@
           <a:bodyPr wrap="square" lIns="0" tIns="0" rIns="0" bIns="0" rtlCol="0" anchor="ctr"/>
           <a:lstStyle/>
           <a:p>
-            <a:pPr indent="0" marL="0">
+            <a:pPr marL="0" indent="0">
               <a:lnSpc>
                 <a:spcPct val="130000"/>
               </a:lnSpc>
@@ -1509,7 +1275,7 @@
             <a:endParaRPr lang="en-US" sz="1600" dirty="0"/>
           </a:p>
           <a:p>
-            <a:pPr indent="0" marL="0">
+            <a:pPr marL="0" indent="0">
               <a:lnSpc>
                 <a:spcPct val="130000"/>
               </a:lnSpc>
@@ -1549,6 +1315,13 @@
           </a:solidFill>
           <a:ln/>
         </p:spPr>
+        <p:txBody>
+          <a:bodyPr/>
+          <a:lstStyle/>
+          <a:p>
+            <a:endParaRPr lang="en-US"/>
+          </a:p>
+        </p:txBody>
       </p:sp>
       <p:sp>
         <p:nvSpPr>
@@ -1571,7 +1344,7 @@
           <a:bodyPr wrap="square" lIns="0" tIns="0" rIns="0" bIns="0" rtlCol="0" anchor="ctr"/>
           <a:lstStyle/>
           <a:p>
-            <a:pPr indent="0" marL="0">
+            <a:pPr marL="0" indent="0">
               <a:buNone/>
             </a:pPr>
             <a:r>
@@ -1610,7 +1383,7 @@
           <a:bodyPr wrap="square" lIns="0" tIns="0" rIns="0" bIns="0" rtlCol="0" anchor="ctr"/>
           <a:lstStyle/>
           <a:p>
-            <a:pPr algn="r" indent="0" marL="0">
+            <a:pPr marL="0" indent="0" algn="r">
               <a:buNone/>
             </a:pPr>
             <a:r>
@@ -1644,6 +1417,7 @@
         <a:solidFill>
           <a:srgbClr val="F8FAFC"/>
         </a:solidFill>
+        <a:effectLst/>
       </p:bgPr>
     </p:bg>
     <p:spTree>
@@ -1679,6 +1453,13 @@
           </a:solidFill>
           <a:ln/>
         </p:spPr>
+        <p:txBody>
+          <a:bodyPr/>
+          <a:lstStyle/>
+          <a:p>
+            <a:endParaRPr lang="en-US"/>
+          </a:p>
+        </p:txBody>
       </p:sp>
       <p:sp>
         <p:nvSpPr>
@@ -1701,7 +1482,7 @@
           <a:bodyPr wrap="square" lIns="0" tIns="0" rIns="0" bIns="0" rtlCol="0" anchor="ctr"/>
           <a:lstStyle/>
           <a:p>
-            <a:pPr indent="0" marL="0">
+            <a:pPr marL="0" indent="0">
               <a:buNone/>
             </a:pPr>
             <a:r>
@@ -1738,13 +1519,20 @@
           </a:solidFill>
           <a:ln/>
           <a:effectLst>
-            <a:outerShdw sx="100000" sy="100000" kx="0" ky="0" algn="bl" rotWithShape="0" blurRad="50800" dist="12700" dir="8100000">
+            <a:outerShdw blurRad="50800" dist="12700" dir="8100000" algn="bl" rotWithShape="0">
               <a:srgbClr val="000000">
                 <a:alpha val="8000"/>
               </a:srgbClr>
             </a:outerShdw>
           </a:effectLst>
         </p:spPr>
+        <p:txBody>
+          <a:bodyPr/>
+          <a:lstStyle/>
+          <a:p>
+            <a:endParaRPr lang="en-US"/>
+          </a:p>
+        </p:txBody>
       </p:sp>
       <p:sp>
         <p:nvSpPr>
@@ -1765,6 +1553,13 @@
           </a:solidFill>
           <a:ln/>
         </p:spPr>
+        <p:txBody>
+          <a:bodyPr/>
+          <a:lstStyle/>
+          <a:p>
+            <a:endParaRPr lang="en-US"/>
+          </a:p>
+        </p:txBody>
       </p:sp>
       <p:sp>
         <p:nvSpPr>
@@ -1785,18 +1580,25 @@
           </a:solidFill>
           <a:ln/>
         </p:spPr>
+        <p:txBody>
+          <a:bodyPr/>
+          <a:lstStyle/>
+          <a:p>
+            <a:endParaRPr lang="en-US"/>
+          </a:p>
+        </p:txBody>
       </p:sp>
       <p:pic>
         <p:nvPicPr>
-          <p:cNvPr id="7" name="Image 0" descr="preencoded.png">    </p:cNvPr>
+          <p:cNvPr id="7" name="Image 0" descr="preencoded.png"/>
           <p:cNvPicPr>
             <a:picLocks noChangeAspect="1"/>
           </p:cNvPicPr>
           <p:nvPr/>
         </p:nvPicPr>
         <p:blipFill>
-          <a:blip r:embed="rId1"/>
-          <a:srcRect l="0" r="0" t="0" b="0"/>
+          <a:blip r:embed="rId3"/>
+          <a:srcRect/>
           <a:stretch/>
         </p:blipFill>
         <p:spPr>
@@ -1830,7 +1632,7 @@
           <a:bodyPr wrap="square" lIns="0" tIns="0" rIns="0" bIns="0" rtlCol="0" anchor="ctr"/>
           <a:lstStyle/>
           <a:p>
-            <a:pPr indent="0" marL="0">
+            <a:pPr marL="0" indent="0">
               <a:buNone/>
             </a:pPr>
             <a:r>
@@ -1869,7 +1671,7 @@
           <a:bodyPr wrap="square" lIns="0" tIns="0" rIns="0" bIns="0" rtlCol="0" anchor="ctr"/>
           <a:lstStyle/>
           <a:p>
-            <a:pPr indent="0" marL="0">
+            <a:pPr marL="0" indent="0">
               <a:lnSpc>
                 <a:spcPct val="120000"/>
               </a:lnSpc>
@@ -1889,7 +1691,7 @@
             <a:endParaRPr lang="en-US" sz="1100" dirty="0"/>
           </a:p>
           <a:p>
-            <a:pPr indent="0" marL="0">
+            <a:pPr marL="0" indent="0">
               <a:lnSpc>
                 <a:spcPct val="120000"/>
               </a:lnSpc>
@@ -1929,13 +1731,20 @@
           </a:solidFill>
           <a:ln/>
           <a:effectLst>
-            <a:outerShdw sx="100000" sy="100000" kx="0" ky="0" algn="bl" rotWithShape="0" blurRad="50800" dist="12700" dir="8100000">
+            <a:outerShdw blurRad="50800" dist="12700" dir="8100000" algn="bl" rotWithShape="0">
               <a:srgbClr val="000000">
                 <a:alpha val="8000"/>
               </a:srgbClr>
             </a:outerShdw>
           </a:effectLst>
         </p:spPr>
+        <p:txBody>
+          <a:bodyPr/>
+          <a:lstStyle/>
+          <a:p>
+            <a:endParaRPr lang="en-US"/>
+          </a:p>
+        </p:txBody>
       </p:sp>
       <p:sp>
         <p:nvSpPr>
@@ -1956,6 +1765,13 @@
           </a:solidFill>
           <a:ln/>
         </p:spPr>
+        <p:txBody>
+          <a:bodyPr/>
+          <a:lstStyle/>
+          <a:p>
+            <a:endParaRPr lang="en-US"/>
+          </a:p>
+        </p:txBody>
       </p:sp>
       <p:sp>
         <p:nvSpPr>
@@ -1976,18 +1792,25 @@
           </a:solidFill>
           <a:ln/>
         </p:spPr>
+        <p:txBody>
+          <a:bodyPr/>
+          <a:lstStyle/>
+          <a:p>
+            <a:endParaRPr lang="en-US"/>
+          </a:p>
+        </p:txBody>
       </p:sp>
       <p:pic>
         <p:nvPicPr>
-          <p:cNvPr id="13" name="Image 1" descr="preencoded.png">    </p:cNvPr>
+          <p:cNvPr id="13" name="Image 1" descr="preencoded.png"/>
           <p:cNvPicPr>
             <a:picLocks noChangeAspect="1"/>
           </p:cNvPicPr>
           <p:nvPr/>
         </p:nvPicPr>
         <p:blipFill>
-          <a:blip r:embed="rId2"/>
-          <a:srcRect l="0" r="0" t="0" b="0"/>
+          <a:blip r:embed="rId4"/>
+          <a:srcRect/>
           <a:stretch/>
         </p:blipFill>
         <p:spPr>
@@ -2021,7 +1844,7 @@
           <a:bodyPr wrap="square" lIns="0" tIns="0" rIns="0" bIns="0" rtlCol="0" anchor="ctr"/>
           <a:lstStyle/>
           <a:p>
-            <a:pPr indent="0" marL="0">
+            <a:pPr marL="0" indent="0">
               <a:buNone/>
             </a:pPr>
             <a:r>
@@ -2060,7 +1883,7 @@
           <a:bodyPr wrap="square" lIns="0" tIns="0" rIns="0" bIns="0" rtlCol="0" anchor="ctr"/>
           <a:lstStyle/>
           <a:p>
-            <a:pPr indent="0" marL="0">
+            <a:pPr marL="0" indent="0">
               <a:lnSpc>
                 <a:spcPct val="120000"/>
               </a:lnSpc>
@@ -2080,7 +1903,7 @@
             <a:endParaRPr lang="en-US" sz="1100" dirty="0"/>
           </a:p>
           <a:p>
-            <a:pPr indent="0" marL="0">
+            <a:pPr marL="0" indent="0">
               <a:lnSpc>
                 <a:spcPct val="120000"/>
               </a:lnSpc>
@@ -2120,13 +1943,20 @@
           </a:solidFill>
           <a:ln/>
           <a:effectLst>
-            <a:outerShdw sx="100000" sy="100000" kx="0" ky="0" algn="bl" rotWithShape="0" blurRad="50800" dist="12700" dir="8100000">
+            <a:outerShdw blurRad="50800" dist="12700" dir="8100000" algn="bl" rotWithShape="0">
               <a:srgbClr val="000000">
                 <a:alpha val="8000"/>
               </a:srgbClr>
             </a:outerShdw>
           </a:effectLst>
         </p:spPr>
+        <p:txBody>
+          <a:bodyPr/>
+          <a:lstStyle/>
+          <a:p>
+            <a:endParaRPr lang="en-US"/>
+          </a:p>
+        </p:txBody>
       </p:sp>
       <p:sp>
         <p:nvSpPr>
@@ -2147,6 +1977,13 @@
           </a:solidFill>
           <a:ln/>
         </p:spPr>
+        <p:txBody>
+          <a:bodyPr/>
+          <a:lstStyle/>
+          <a:p>
+            <a:endParaRPr lang="en-US"/>
+          </a:p>
+        </p:txBody>
       </p:sp>
       <p:sp>
         <p:nvSpPr>
@@ -2167,18 +2004,25 @@
           </a:solidFill>
           <a:ln/>
         </p:spPr>
+        <p:txBody>
+          <a:bodyPr/>
+          <a:lstStyle/>
+          <a:p>
+            <a:endParaRPr lang="en-US"/>
+          </a:p>
+        </p:txBody>
       </p:sp>
       <p:pic>
         <p:nvPicPr>
-          <p:cNvPr id="19" name="Image 2" descr="preencoded.png">    </p:cNvPr>
+          <p:cNvPr id="19" name="Image 2" descr="preencoded.png"/>
           <p:cNvPicPr>
             <a:picLocks noChangeAspect="1"/>
           </p:cNvPicPr>
           <p:nvPr/>
         </p:nvPicPr>
         <p:blipFill>
-          <a:blip r:embed="rId3"/>
-          <a:srcRect l="0" r="0" t="0" b="0"/>
+          <a:blip r:embed="rId5"/>
+          <a:srcRect/>
           <a:stretch/>
         </p:blipFill>
         <p:spPr>
@@ -2212,7 +2056,7 @@
           <a:bodyPr wrap="square" lIns="0" tIns="0" rIns="0" bIns="0" rtlCol="0" anchor="ctr"/>
           <a:lstStyle/>
           <a:p>
-            <a:pPr indent="0" marL="0">
+            <a:pPr marL="0" indent="0">
               <a:buNone/>
             </a:pPr>
             <a:r>
@@ -2251,7 +2095,7 @@
           <a:bodyPr wrap="square" lIns="0" tIns="0" rIns="0" bIns="0" rtlCol="0" anchor="ctr"/>
           <a:lstStyle/>
           <a:p>
-            <a:pPr indent="0" marL="0">
+            <a:pPr marL="0" indent="0">
               <a:lnSpc>
                 <a:spcPct val="120000"/>
               </a:lnSpc>
@@ -2271,7 +2115,7 @@
             <a:endParaRPr lang="en-US" sz="1100" dirty="0"/>
           </a:p>
           <a:p>
-            <a:pPr indent="0" marL="0">
+            <a:pPr marL="0" indent="0">
               <a:lnSpc>
                 <a:spcPct val="120000"/>
               </a:lnSpc>
@@ -2311,13 +2155,20 @@
           </a:solidFill>
           <a:ln/>
           <a:effectLst>
-            <a:outerShdw sx="100000" sy="100000" kx="0" ky="0" algn="bl" rotWithShape="0" blurRad="50800" dist="12700" dir="8100000">
+            <a:outerShdw blurRad="50800" dist="12700" dir="8100000" algn="bl" rotWithShape="0">
               <a:srgbClr val="000000">
                 <a:alpha val="8000"/>
               </a:srgbClr>
             </a:outerShdw>
           </a:effectLst>
         </p:spPr>
+        <p:txBody>
+          <a:bodyPr/>
+          <a:lstStyle/>
+          <a:p>
+            <a:endParaRPr lang="en-US"/>
+          </a:p>
+        </p:txBody>
       </p:sp>
       <p:sp>
         <p:nvSpPr>
@@ -2338,6 +2189,13 @@
           </a:solidFill>
           <a:ln/>
         </p:spPr>
+        <p:txBody>
+          <a:bodyPr/>
+          <a:lstStyle/>
+          <a:p>
+            <a:endParaRPr lang="en-US"/>
+          </a:p>
+        </p:txBody>
       </p:sp>
       <p:sp>
         <p:nvSpPr>
@@ -2360,7 +2218,7 @@
           <a:bodyPr wrap="square" lIns="0" tIns="0" rIns="0" bIns="0" rtlCol="0" anchor="ctr"/>
           <a:lstStyle/>
           <a:p>
-            <a:pPr indent="0" marL="0">
+            <a:pPr marL="0" indent="0">
               <a:buNone/>
             </a:pPr>
             <a:r>
@@ -2399,7 +2257,7 @@
           <a:bodyPr wrap="square" lIns="0" tIns="0" rIns="0" bIns="0" rtlCol="0" anchor="ctr"/>
           <a:lstStyle/>
           <a:p>
-            <a:pPr indent="0" marL="0">
+            <a:pPr marL="0" indent="0">
               <a:buNone/>
             </a:pPr>
             <a:r>
@@ -2438,7 +2296,7 @@
           <a:bodyPr wrap="square" lIns="0" tIns="0" rIns="0" bIns="0" rtlCol="0" anchor="ctr"/>
           <a:lstStyle/>
           <a:p>
-            <a:pPr indent="0" marL="0">
+            <a:pPr marL="0" indent="0">
               <a:buNone/>
             </a:pPr>
             <a:r>
@@ -2477,7 +2335,7 @@
           <a:bodyPr wrap="square" lIns="0" tIns="0" rIns="0" bIns="0" rtlCol="0" anchor="ctr"/>
           <a:lstStyle/>
           <a:p>
-            <a:pPr indent="0" marL="0">
+            <a:pPr marL="0" indent="0">
               <a:buNone/>
             </a:pPr>
             <a:r>
@@ -2517,6 +2375,13 @@
             <a:prstDash val="solid"/>
           </a:ln>
         </p:spPr>
+        <p:txBody>
+          <a:bodyPr/>
+          <a:lstStyle/>
+          <a:p>
+            <a:endParaRPr lang="en-US"/>
+          </a:p>
+        </p:txBody>
       </p:sp>
       <p:sp>
         <p:nvSpPr>
@@ -2539,7 +2404,7 @@
           <a:bodyPr wrap="square" lIns="0" tIns="0" rIns="0" bIns="0" rtlCol="0" anchor="ctr"/>
           <a:lstStyle/>
           <a:p>
-            <a:pPr indent="0" marL="0">
+            <a:pPr marL="0" indent="0">
               <a:buNone/>
             </a:pPr>
             <a:r>
@@ -2578,7 +2443,7 @@
           <a:bodyPr wrap="square" lIns="0" tIns="0" rIns="0" bIns="0" rtlCol="0" anchor="ctr"/>
           <a:lstStyle/>
           <a:p>
-            <a:pPr indent="0" marL="0">
+            <a:pPr marL="0" indent="0">
               <a:buNone/>
             </a:pPr>
             <a:r>
@@ -2618,6 +2483,13 @@
             <a:prstDash val="solid"/>
           </a:ln>
         </p:spPr>
+        <p:txBody>
+          <a:bodyPr/>
+          <a:lstStyle/>
+          <a:p>
+            <a:endParaRPr lang="en-US"/>
+          </a:p>
+        </p:txBody>
       </p:sp>
       <p:sp>
         <p:nvSpPr>
@@ -2640,7 +2512,7 @@
           <a:bodyPr wrap="square" lIns="0" tIns="0" rIns="0" bIns="0" rtlCol="0" anchor="ctr"/>
           <a:lstStyle/>
           <a:p>
-            <a:pPr indent="0" marL="0">
+            <a:pPr marL="0" indent="0">
               <a:buNone/>
             </a:pPr>
             <a:r>
@@ -2679,7 +2551,7 @@
           <a:bodyPr wrap="square" lIns="0" tIns="0" rIns="0" bIns="0" rtlCol="0" anchor="ctr"/>
           <a:lstStyle/>
           <a:p>
-            <a:pPr indent="0" marL="0">
+            <a:pPr marL="0" indent="0">
               <a:buNone/>
             </a:pPr>
             <a:r>
@@ -2719,6 +2591,13 @@
             <a:prstDash val="solid"/>
           </a:ln>
         </p:spPr>
+        <p:txBody>
+          <a:bodyPr/>
+          <a:lstStyle/>
+          <a:p>
+            <a:endParaRPr lang="en-US"/>
+          </a:p>
+        </p:txBody>
       </p:sp>
       <p:sp>
         <p:nvSpPr>
@@ -2741,7 +2620,7 @@
           <a:bodyPr wrap="square" lIns="0" tIns="0" rIns="0" bIns="0" rtlCol="0" anchor="ctr"/>
           <a:lstStyle/>
           <a:p>
-            <a:pPr indent="0" marL="0">
+            <a:pPr marL="0" indent="0">
               <a:buNone/>
             </a:pPr>
             <a:r>
@@ -2780,7 +2659,7 @@
           <a:bodyPr wrap="square" lIns="0" tIns="0" rIns="0" bIns="0" rtlCol="0" anchor="ctr"/>
           <a:lstStyle/>
           <a:p>
-            <a:pPr indent="0" marL="0">
+            <a:pPr marL="0" indent="0">
               <a:buNone/>
             </a:pPr>
             <a:r>
@@ -2819,7 +2698,7 @@
           <a:bodyPr wrap="square" lIns="0" tIns="0" rIns="0" bIns="0" rtlCol="0" anchor="ctr"/>
           <a:lstStyle/>
           <a:p>
-            <a:pPr indent="0" marL="0">
+            <a:pPr marL="0" indent="0">
               <a:buNone/>
             </a:pPr>
             <a:r>
@@ -2853,6 +2732,7 @@
         <a:solidFill>
           <a:srgbClr val="F8FAFC"/>
         </a:solidFill>
+        <a:effectLst/>
       </p:bgPr>
     </p:bg>
     <p:spTree>
@@ -2888,6 +2768,13 @@
           </a:solidFill>
           <a:ln/>
         </p:spPr>
+        <p:txBody>
+          <a:bodyPr/>
+          <a:lstStyle/>
+          <a:p>
+            <a:endParaRPr lang="en-US"/>
+          </a:p>
+        </p:txBody>
       </p:sp>
       <p:sp>
         <p:nvSpPr>
@@ -2910,7 +2797,7 @@
           <a:bodyPr wrap="square" lIns="0" tIns="0" rIns="0" bIns="0" rtlCol="0" anchor="ctr"/>
           <a:lstStyle/>
           <a:p>
-            <a:pPr indent="0" marL="0">
+            <a:pPr marL="0" indent="0">
               <a:buNone/>
             </a:pPr>
             <a:r>
@@ -2947,13 +2834,20 @@
           </a:solidFill>
           <a:ln/>
           <a:effectLst>
-            <a:outerShdw sx="100000" sy="100000" kx="0" ky="0" algn="bl" rotWithShape="0" blurRad="50800" dist="12700" dir="8100000">
+            <a:outerShdw blurRad="50800" dist="12700" dir="8100000" algn="bl" rotWithShape="0">
               <a:srgbClr val="000000">
                 <a:alpha val="8000"/>
               </a:srgbClr>
             </a:outerShdw>
           </a:effectLst>
         </p:spPr>
+        <p:txBody>
+          <a:bodyPr/>
+          <a:lstStyle/>
+          <a:p>
+            <a:endParaRPr lang="en-US"/>
+          </a:p>
+        </p:txBody>
       </p:sp>
       <p:sp>
         <p:nvSpPr>
@@ -2974,6 +2868,13 @@
           </a:solidFill>
           <a:ln/>
         </p:spPr>
+        <p:txBody>
+          <a:bodyPr/>
+          <a:lstStyle/>
+          <a:p>
+            <a:endParaRPr lang="en-US"/>
+          </a:p>
+        </p:txBody>
       </p:sp>
       <p:sp>
         <p:nvSpPr>
@@ -2994,18 +2895,25 @@
           </a:solidFill>
           <a:ln/>
         </p:spPr>
+        <p:txBody>
+          <a:bodyPr/>
+          <a:lstStyle/>
+          <a:p>
+            <a:endParaRPr lang="en-US"/>
+          </a:p>
+        </p:txBody>
       </p:sp>
       <p:pic>
         <p:nvPicPr>
-          <p:cNvPr id="7" name="Image 0" descr="preencoded.png">    </p:cNvPr>
+          <p:cNvPr id="7" name="Image 0" descr="preencoded.png"/>
           <p:cNvPicPr>
             <a:picLocks noChangeAspect="1"/>
           </p:cNvPicPr>
           <p:nvPr/>
         </p:nvPicPr>
         <p:blipFill>
-          <a:blip r:embed="rId1"/>
-          <a:srcRect l="0" r="0" t="0" b="0"/>
+          <a:blip r:embed="rId3"/>
+          <a:srcRect/>
           <a:stretch/>
         </p:blipFill>
         <p:spPr>
@@ -3039,7 +2947,7 @@
           <a:bodyPr wrap="square" lIns="0" tIns="0" rIns="0" bIns="0" rtlCol="0" anchor="ctr"/>
           <a:lstStyle/>
           <a:p>
-            <a:pPr algn="ctr" indent="0" marL="0">
+            <a:pPr marL="0" indent="0" algn="ctr">
               <a:buNone/>
             </a:pPr>
             <a:r>
@@ -3078,7 +2986,7 @@
           <a:bodyPr wrap="square" lIns="0" tIns="0" rIns="0" bIns="0" rtlCol="0" anchor="ctr"/>
           <a:lstStyle/>
           <a:p>
-            <a:pPr algn="ctr" indent="0" marL="0">
+            <a:pPr marL="0" indent="0" algn="ctr">
               <a:lnSpc>
                 <a:spcPct val="130000"/>
               </a:lnSpc>
@@ -3098,7 +3006,7 @@
             <a:endParaRPr lang="en-US" sz="1100" dirty="0"/>
           </a:p>
           <a:p>
-            <a:pPr algn="ctr" indent="0" marL="0">
+            <a:pPr marL="0" indent="0" algn="ctr">
               <a:lnSpc>
                 <a:spcPct val="130000"/>
               </a:lnSpc>
@@ -3138,13 +3046,20 @@
           </a:solidFill>
           <a:ln/>
           <a:effectLst>
-            <a:outerShdw sx="100000" sy="100000" kx="0" ky="0" algn="bl" rotWithShape="0" blurRad="50800" dist="12700" dir="8100000">
+            <a:outerShdw blurRad="50800" dist="12700" dir="8100000" algn="bl" rotWithShape="0">
               <a:srgbClr val="000000">
                 <a:alpha val="8000"/>
               </a:srgbClr>
             </a:outerShdw>
           </a:effectLst>
         </p:spPr>
+        <p:txBody>
+          <a:bodyPr/>
+          <a:lstStyle/>
+          <a:p>
+            <a:endParaRPr lang="en-US"/>
+          </a:p>
+        </p:txBody>
       </p:sp>
       <p:sp>
         <p:nvSpPr>
@@ -3165,6 +3080,13 @@
           </a:solidFill>
           <a:ln/>
         </p:spPr>
+        <p:txBody>
+          <a:bodyPr/>
+          <a:lstStyle/>
+          <a:p>
+            <a:endParaRPr lang="en-US"/>
+          </a:p>
+        </p:txBody>
       </p:sp>
       <p:sp>
         <p:nvSpPr>
@@ -3185,18 +3107,25 @@
           </a:solidFill>
           <a:ln/>
         </p:spPr>
+        <p:txBody>
+          <a:bodyPr/>
+          <a:lstStyle/>
+          <a:p>
+            <a:endParaRPr lang="en-US"/>
+          </a:p>
+        </p:txBody>
       </p:sp>
       <p:pic>
         <p:nvPicPr>
-          <p:cNvPr id="13" name="Image 1" descr="preencoded.png">    </p:cNvPr>
+          <p:cNvPr id="13" name="Image 1" descr="preencoded.png"/>
           <p:cNvPicPr>
             <a:picLocks noChangeAspect="1"/>
           </p:cNvPicPr>
           <p:nvPr/>
         </p:nvPicPr>
         <p:blipFill>
-          <a:blip r:embed="rId2"/>
-          <a:srcRect l="0" r="0" t="0" b="0"/>
+          <a:blip r:embed="rId4"/>
+          <a:srcRect/>
           <a:stretch/>
         </p:blipFill>
         <p:spPr>
@@ -3230,7 +3159,7 @@
           <a:bodyPr wrap="square" lIns="0" tIns="0" rIns="0" bIns="0" rtlCol="0" anchor="ctr"/>
           <a:lstStyle/>
           <a:p>
-            <a:pPr algn="ctr" indent="0" marL="0">
+            <a:pPr marL="0" indent="0" algn="ctr">
               <a:buNone/>
             </a:pPr>
             <a:r>
@@ -3269,7 +3198,7 @@
           <a:bodyPr wrap="square" lIns="0" tIns="0" rIns="0" bIns="0" rtlCol="0" anchor="ctr"/>
           <a:lstStyle/>
           <a:p>
-            <a:pPr algn="ctr" indent="0" marL="0">
+            <a:pPr marL="0" indent="0" algn="ctr">
               <a:lnSpc>
                 <a:spcPct val="130000"/>
               </a:lnSpc>
@@ -3289,7 +3218,7 @@
             <a:endParaRPr lang="en-US" sz="1100" dirty="0"/>
           </a:p>
           <a:p>
-            <a:pPr algn="ctr" indent="0" marL="0">
+            <a:pPr marL="0" indent="0" algn="ctr">
               <a:lnSpc>
                 <a:spcPct val="130000"/>
               </a:lnSpc>
@@ -3329,13 +3258,20 @@
           </a:solidFill>
           <a:ln/>
           <a:effectLst>
-            <a:outerShdw sx="100000" sy="100000" kx="0" ky="0" algn="bl" rotWithShape="0" blurRad="50800" dist="12700" dir="8100000">
+            <a:outerShdw blurRad="50800" dist="12700" dir="8100000" algn="bl" rotWithShape="0">
               <a:srgbClr val="000000">
                 <a:alpha val="8000"/>
               </a:srgbClr>
             </a:outerShdw>
           </a:effectLst>
         </p:spPr>
+        <p:txBody>
+          <a:bodyPr/>
+          <a:lstStyle/>
+          <a:p>
+            <a:endParaRPr lang="en-US"/>
+          </a:p>
+        </p:txBody>
       </p:sp>
       <p:sp>
         <p:nvSpPr>
@@ -3356,6 +3292,13 @@
           </a:solidFill>
           <a:ln/>
         </p:spPr>
+        <p:txBody>
+          <a:bodyPr/>
+          <a:lstStyle/>
+          <a:p>
+            <a:endParaRPr lang="en-US"/>
+          </a:p>
+        </p:txBody>
       </p:sp>
       <p:sp>
         <p:nvSpPr>
@@ -3376,18 +3319,25 @@
           </a:solidFill>
           <a:ln/>
         </p:spPr>
+        <p:txBody>
+          <a:bodyPr/>
+          <a:lstStyle/>
+          <a:p>
+            <a:endParaRPr lang="en-US"/>
+          </a:p>
+        </p:txBody>
       </p:sp>
       <p:pic>
         <p:nvPicPr>
-          <p:cNvPr id="19" name="Image 2" descr="preencoded.png">    </p:cNvPr>
+          <p:cNvPr id="19" name="Image 2" descr="preencoded.png"/>
           <p:cNvPicPr>
             <a:picLocks noChangeAspect="1"/>
           </p:cNvPicPr>
           <p:nvPr/>
         </p:nvPicPr>
         <p:blipFill>
-          <a:blip r:embed="rId3"/>
-          <a:srcRect l="0" r="0" t="0" b="0"/>
+          <a:blip r:embed="rId5"/>
+          <a:srcRect/>
           <a:stretch/>
         </p:blipFill>
         <p:spPr>
@@ -3421,7 +3371,7 @@
           <a:bodyPr wrap="square" lIns="0" tIns="0" rIns="0" bIns="0" rtlCol="0" anchor="ctr"/>
           <a:lstStyle/>
           <a:p>
-            <a:pPr algn="ctr" indent="0" marL="0">
+            <a:pPr marL="0" indent="0" algn="ctr">
               <a:buNone/>
             </a:pPr>
             <a:r>
@@ -3460,7 +3410,7 @@
           <a:bodyPr wrap="square" lIns="0" tIns="0" rIns="0" bIns="0" rtlCol="0" anchor="ctr"/>
           <a:lstStyle/>
           <a:p>
-            <a:pPr algn="ctr" indent="0" marL="0">
+            <a:pPr marL="0" indent="0" algn="ctr">
               <a:lnSpc>
                 <a:spcPct val="130000"/>
               </a:lnSpc>
@@ -3480,7 +3430,7 @@
             <a:endParaRPr lang="en-US" sz="1100" dirty="0"/>
           </a:p>
           <a:p>
-            <a:pPr algn="ctr" indent="0" marL="0">
+            <a:pPr marL="0" indent="0" algn="ctr">
               <a:lnSpc>
                 <a:spcPct val="130000"/>
               </a:lnSpc>
@@ -3520,13 +3470,20 @@
           </a:solidFill>
           <a:ln/>
           <a:effectLst>
-            <a:outerShdw sx="100000" sy="100000" kx="0" ky="0" algn="bl" rotWithShape="0" blurRad="50800" dist="12700" dir="8100000">
+            <a:outerShdw blurRad="50800" dist="12700" dir="8100000" algn="bl" rotWithShape="0">
               <a:srgbClr val="000000">
                 <a:alpha val="8000"/>
               </a:srgbClr>
             </a:outerShdw>
           </a:effectLst>
         </p:spPr>
+        <p:txBody>
+          <a:bodyPr/>
+          <a:lstStyle/>
+          <a:p>
+            <a:endParaRPr lang="en-US"/>
+          </a:p>
+        </p:txBody>
       </p:sp>
       <p:sp>
         <p:nvSpPr>
@@ -3547,6 +3504,13 @@
           </a:solidFill>
           <a:ln/>
         </p:spPr>
+        <p:txBody>
+          <a:bodyPr/>
+          <a:lstStyle/>
+          <a:p>
+            <a:endParaRPr lang="en-US"/>
+          </a:p>
+        </p:txBody>
       </p:sp>
       <p:sp>
         <p:nvSpPr>
@@ -3569,7 +3533,7 @@
           <a:bodyPr wrap="square" lIns="0" tIns="0" rIns="0" bIns="0" rtlCol="0" anchor="ctr"/>
           <a:lstStyle/>
           <a:p>
-            <a:pPr indent="0" marL="0">
+            <a:pPr marL="0" indent="0">
               <a:buNone/>
             </a:pPr>
             <a:r>
@@ -3589,21 +3553,21 @@
       </p:sp>
       <p:pic>
         <p:nvPicPr>
-          <p:cNvPr id="25" name="Image 3" descr="preencoded.png">    </p:cNvPr>
+          <p:cNvPr id="25" name="Image 3" descr="preencoded.png"/>
           <p:cNvPicPr>
             <a:picLocks noChangeAspect="1"/>
           </p:cNvPicPr>
           <p:nvPr/>
         </p:nvPicPr>
         <p:blipFill>
-          <a:blip r:embed="rId4"/>
-          <a:srcRect l="0" r="0" t="0" b="0"/>
+          <a:blip r:embed="rId6"/>
+          <a:srcRect/>
           <a:stretch/>
         </p:blipFill>
         <p:spPr>
           <a:xfrm>
-            <a:off x="731520" y="3520440"/>
-            <a:ext cx="7680960" cy="1371600"/>
+            <a:off x="1396652" y="3310128"/>
+            <a:ext cx="6486945" cy="1993392"/>
           </a:xfrm>
           <a:prstGeom prst="rect">
             <a:avLst/>
@@ -3626,6 +3590,7 @@
         <a:solidFill>
           <a:srgbClr val="F8FAFC"/>
         </a:solidFill>
+        <a:effectLst/>
       </p:bgPr>
     </p:bg>
     <p:spTree>
@@ -3661,6 +3626,13 @@
           </a:solidFill>
           <a:ln/>
         </p:spPr>
+        <p:txBody>
+          <a:bodyPr/>
+          <a:lstStyle/>
+          <a:p>
+            <a:endParaRPr lang="en-US"/>
+          </a:p>
+        </p:txBody>
       </p:sp>
       <p:sp>
         <p:nvSpPr>
@@ -3683,7 +3655,7 @@
           <a:bodyPr wrap="square" lIns="0" tIns="0" rIns="0" bIns="0" rtlCol="0" anchor="ctr"/>
           <a:lstStyle/>
           <a:p>
-            <a:pPr indent="0" marL="0">
+            <a:pPr marL="0" indent="0">
               <a:buNone/>
             </a:pPr>
             <a:r>
@@ -3720,13 +3692,20 @@
           </a:solidFill>
           <a:ln/>
           <a:effectLst>
-            <a:outerShdw sx="100000" sy="100000" kx="0" ky="0" algn="bl" rotWithShape="0" blurRad="50800" dist="12700" dir="8100000">
+            <a:outerShdw blurRad="50800" dist="12700" dir="8100000" algn="bl" rotWithShape="0">
               <a:srgbClr val="000000">
                 <a:alpha val="8000"/>
               </a:srgbClr>
             </a:outerShdw>
           </a:effectLst>
         </p:spPr>
+        <p:txBody>
+          <a:bodyPr/>
+          <a:lstStyle/>
+          <a:p>
+            <a:endParaRPr lang="en-US"/>
+          </a:p>
+        </p:txBody>
       </p:sp>
       <p:sp>
         <p:nvSpPr>
@@ -3747,18 +3726,25 @@
           </a:solidFill>
           <a:ln/>
         </p:spPr>
+        <p:txBody>
+          <a:bodyPr/>
+          <a:lstStyle/>
+          <a:p>
+            <a:endParaRPr lang="en-US"/>
+          </a:p>
+        </p:txBody>
       </p:sp>
       <p:pic>
         <p:nvPicPr>
-          <p:cNvPr id="6" name="Image 0" descr="preencoded.png">    </p:cNvPr>
+          <p:cNvPr id="6" name="Image 0" descr="preencoded.png"/>
           <p:cNvPicPr>
             <a:picLocks noChangeAspect="1"/>
           </p:cNvPicPr>
           <p:nvPr/>
         </p:nvPicPr>
         <p:blipFill>
-          <a:blip r:embed="rId1"/>
-          <a:srcRect l="0" r="0" t="0" b="0"/>
+          <a:blip r:embed="rId3"/>
+          <a:srcRect/>
           <a:stretch/>
         </p:blipFill>
         <p:spPr>
@@ -3773,15 +3759,15 @@
       </p:pic>
       <p:pic>
         <p:nvPicPr>
-          <p:cNvPr id="7" name="Image 1" descr="preencoded.png">    </p:cNvPr>
+          <p:cNvPr id="7" name="Image 1" descr="preencoded.png"/>
           <p:cNvPicPr>
             <a:picLocks noChangeAspect="1"/>
           </p:cNvPicPr>
           <p:nvPr/>
         </p:nvPicPr>
         <p:blipFill>
-          <a:blip r:embed="rId2"/>
-          <a:srcRect l="0" r="0" t="0" b="0"/>
+          <a:blip r:embed="rId4"/>
+          <a:srcRect/>
           <a:stretch/>
         </p:blipFill>
         <p:spPr>
@@ -3815,7 +3801,7 @@
           <a:bodyPr wrap="square" lIns="0" tIns="0" rIns="0" bIns="0" rtlCol="0" anchor="ctr"/>
           <a:lstStyle/>
           <a:p>
-            <a:pPr indent="0" marL="0">
+            <a:pPr marL="0" indent="0">
               <a:buNone/>
             </a:pPr>
             <a:r>
@@ -3854,7 +3840,7 @@
           <a:bodyPr wrap="square" lIns="0" tIns="0" rIns="0" bIns="0" rtlCol="0" anchor="ctr"/>
           <a:lstStyle/>
           <a:p>
-            <a:pPr indent="0" marL="0">
+            <a:pPr marL="0" indent="0">
               <a:lnSpc>
                 <a:spcPct val="120000"/>
               </a:lnSpc>
@@ -3874,7 +3860,7 @@
             <a:endParaRPr lang="en-US" sz="900" dirty="0"/>
           </a:p>
           <a:p>
-            <a:pPr indent="0" marL="0">
+            <a:pPr marL="0" indent="0">
               <a:lnSpc>
                 <a:spcPct val="120000"/>
               </a:lnSpc>
@@ -3914,13 +3900,20 @@
           </a:solidFill>
           <a:ln/>
           <a:effectLst>
-            <a:outerShdw sx="100000" sy="100000" kx="0" ky="0" algn="bl" rotWithShape="0" blurRad="50800" dist="12700" dir="8100000">
+            <a:outerShdw blurRad="50800" dist="12700" dir="8100000" algn="bl" rotWithShape="0">
               <a:srgbClr val="000000">
                 <a:alpha val="8000"/>
               </a:srgbClr>
             </a:outerShdw>
           </a:effectLst>
         </p:spPr>
+        <p:txBody>
+          <a:bodyPr/>
+          <a:lstStyle/>
+          <a:p>
+            <a:endParaRPr lang="en-US"/>
+          </a:p>
+        </p:txBody>
       </p:sp>
       <p:sp>
         <p:nvSpPr>
@@ -3941,18 +3934,25 @@
           </a:solidFill>
           <a:ln/>
         </p:spPr>
+        <p:txBody>
+          <a:bodyPr/>
+          <a:lstStyle/>
+          <a:p>
+            <a:endParaRPr lang="en-US"/>
+          </a:p>
+        </p:txBody>
       </p:sp>
       <p:pic>
         <p:nvPicPr>
-          <p:cNvPr id="12" name="Image 2" descr="preencoded.png">    </p:cNvPr>
+          <p:cNvPr id="12" name="Image 2" descr="preencoded.png"/>
           <p:cNvPicPr>
             <a:picLocks noChangeAspect="1"/>
           </p:cNvPicPr>
           <p:nvPr/>
         </p:nvPicPr>
         <p:blipFill>
-          <a:blip r:embed="rId3"/>
-          <a:srcRect l="0" r="0" t="0" b="0"/>
+          <a:blip r:embed="rId5"/>
+          <a:srcRect/>
           <a:stretch/>
         </p:blipFill>
         <p:spPr>
@@ -3967,7 +3967,7 @@
       </p:pic>
       <p:pic>
         <p:nvPicPr>
-          <p:cNvPr id="13" name="Image 3" descr="preencoded.png">    </p:cNvPr>
+          <p:cNvPr id="13" name="Image 3" descr="preencoded.png"/>
           <p:cNvPicPr>
             <a:picLocks noChangeAspect="1"/>
           </p:cNvPicPr>
@@ -3975,7 +3975,7 @@
         </p:nvPicPr>
         <p:blipFill>
           <a:blip r:embed="rId4"/>
-          <a:srcRect l="0" r="0" t="0" b="0"/>
+          <a:srcRect/>
           <a:stretch/>
         </p:blipFill>
         <p:spPr>
@@ -4009,7 +4009,7 @@
           <a:bodyPr wrap="square" lIns="0" tIns="0" rIns="0" bIns="0" rtlCol="0" anchor="ctr"/>
           <a:lstStyle/>
           <a:p>
-            <a:pPr indent="0" marL="0">
+            <a:pPr marL="0" indent="0">
               <a:buNone/>
             </a:pPr>
             <a:r>
@@ -4048,7 +4048,7 @@
           <a:bodyPr wrap="square" lIns="0" tIns="0" rIns="0" bIns="0" rtlCol="0" anchor="ctr"/>
           <a:lstStyle/>
           <a:p>
-            <a:pPr indent="0" marL="0">
+            <a:pPr marL="0" indent="0">
               <a:lnSpc>
                 <a:spcPct val="120000"/>
               </a:lnSpc>
@@ -4068,7 +4068,7 @@
             <a:endParaRPr lang="en-US" sz="900" dirty="0"/>
           </a:p>
           <a:p>
-            <a:pPr indent="0" marL="0">
+            <a:pPr marL="0" indent="0">
               <a:lnSpc>
                 <a:spcPct val="120000"/>
               </a:lnSpc>
@@ -4108,13 +4108,20 @@
           </a:solidFill>
           <a:ln/>
           <a:effectLst>
-            <a:outerShdw sx="100000" sy="100000" kx="0" ky="0" algn="bl" rotWithShape="0" blurRad="50800" dist="12700" dir="8100000">
+            <a:outerShdw blurRad="50800" dist="12700" dir="8100000" algn="bl" rotWithShape="0">
               <a:srgbClr val="000000">
                 <a:alpha val="8000"/>
               </a:srgbClr>
             </a:outerShdw>
           </a:effectLst>
         </p:spPr>
+        <p:txBody>
+          <a:bodyPr/>
+          <a:lstStyle/>
+          <a:p>
+            <a:endParaRPr lang="en-US"/>
+          </a:p>
+        </p:txBody>
       </p:sp>
       <p:sp>
         <p:nvSpPr>
@@ -4135,18 +4142,25 @@
           </a:solidFill>
           <a:ln/>
         </p:spPr>
+        <p:txBody>
+          <a:bodyPr/>
+          <a:lstStyle/>
+          <a:p>
+            <a:endParaRPr lang="en-US"/>
+          </a:p>
+        </p:txBody>
       </p:sp>
       <p:pic>
         <p:nvPicPr>
-          <p:cNvPr id="18" name="Image 4" descr="preencoded.png">    </p:cNvPr>
+          <p:cNvPr id="18" name="Image 4" descr="preencoded.png"/>
           <p:cNvPicPr>
             <a:picLocks noChangeAspect="1"/>
           </p:cNvPicPr>
           <p:nvPr/>
         </p:nvPicPr>
         <p:blipFill>
-          <a:blip r:embed="rId5"/>
-          <a:srcRect l="0" r="0" t="0" b="0"/>
+          <a:blip r:embed="rId6"/>
+          <a:srcRect/>
           <a:stretch/>
         </p:blipFill>
         <p:spPr>
@@ -4161,15 +4175,15 @@
       </p:pic>
       <p:pic>
         <p:nvPicPr>
-          <p:cNvPr id="19" name="Image 5" descr="preencoded.png">    </p:cNvPr>
+          <p:cNvPr id="19" name="Image 5" descr="preencoded.png"/>
           <p:cNvPicPr>
             <a:picLocks noChangeAspect="1"/>
           </p:cNvPicPr>
           <p:nvPr/>
         </p:nvPicPr>
         <p:blipFill>
-          <a:blip r:embed="rId6"/>
-          <a:srcRect l="0" r="0" t="0" b="0"/>
+          <a:blip r:embed="rId4"/>
+          <a:srcRect/>
           <a:stretch/>
         </p:blipFill>
         <p:spPr>
@@ -4203,7 +4217,7 @@
           <a:bodyPr wrap="square" lIns="0" tIns="0" rIns="0" bIns="0" rtlCol="0" anchor="ctr"/>
           <a:lstStyle/>
           <a:p>
-            <a:pPr indent="0" marL="0">
+            <a:pPr marL="0" indent="0">
               <a:buNone/>
             </a:pPr>
             <a:r>
@@ -4242,7 +4256,7 @@
           <a:bodyPr wrap="square" lIns="0" tIns="0" rIns="0" bIns="0" rtlCol="0" anchor="ctr"/>
           <a:lstStyle/>
           <a:p>
-            <a:pPr indent="0" marL="0">
+            <a:pPr marL="0" indent="0">
               <a:lnSpc>
                 <a:spcPct val="120000"/>
               </a:lnSpc>
@@ -4262,7 +4276,7 @@
             <a:endParaRPr lang="en-US" sz="900" dirty="0"/>
           </a:p>
           <a:p>
-            <a:pPr indent="0" marL="0">
+            <a:pPr marL="0" indent="0">
               <a:lnSpc>
                 <a:spcPct val="120000"/>
               </a:lnSpc>
@@ -4302,13 +4316,20 @@
           </a:solidFill>
           <a:ln/>
           <a:effectLst>
-            <a:outerShdw sx="100000" sy="100000" kx="0" ky="0" algn="bl" rotWithShape="0" blurRad="50800" dist="12700" dir="8100000">
+            <a:outerShdw blurRad="50800" dist="12700" dir="8100000" algn="bl" rotWithShape="0">
               <a:srgbClr val="000000">
                 <a:alpha val="8000"/>
               </a:srgbClr>
             </a:outerShdw>
           </a:effectLst>
         </p:spPr>
+        <p:txBody>
+          <a:bodyPr/>
+          <a:lstStyle/>
+          <a:p>
+            <a:endParaRPr lang="en-US"/>
+          </a:p>
+        </p:txBody>
       </p:sp>
       <p:sp>
         <p:nvSpPr>
@@ -4329,10 +4350,17 @@
           </a:solidFill>
           <a:ln/>
         </p:spPr>
+        <p:txBody>
+          <a:bodyPr/>
+          <a:lstStyle/>
+          <a:p>
+            <a:endParaRPr lang="en-US"/>
+          </a:p>
+        </p:txBody>
       </p:sp>
       <p:pic>
         <p:nvPicPr>
-          <p:cNvPr id="24" name="Image 6" descr="preencoded.png">    </p:cNvPr>
+          <p:cNvPr id="24" name="Image 6" descr="preencoded.png"/>
           <p:cNvPicPr>
             <a:picLocks noChangeAspect="1"/>
           </p:cNvPicPr>
@@ -4340,7 +4368,7 @@
         </p:nvPicPr>
         <p:blipFill>
           <a:blip r:embed="rId7"/>
-          <a:srcRect l="0" r="0" t="0" b="0"/>
+          <a:srcRect/>
           <a:stretch/>
         </p:blipFill>
         <p:spPr>
@@ -4355,15 +4383,15 @@
       </p:pic>
       <p:pic>
         <p:nvPicPr>
-          <p:cNvPr id="25" name="Image 7" descr="preencoded.png">    </p:cNvPr>
+          <p:cNvPr id="25" name="Image 7" descr="preencoded.png"/>
           <p:cNvPicPr>
             <a:picLocks noChangeAspect="1"/>
           </p:cNvPicPr>
           <p:nvPr/>
         </p:nvPicPr>
         <p:blipFill>
-          <a:blip r:embed="rId8"/>
-          <a:srcRect l="0" r="0" t="0" b="0"/>
+          <a:blip r:embed="rId4"/>
+          <a:srcRect/>
           <a:stretch/>
         </p:blipFill>
         <p:spPr>
@@ -4397,7 +4425,7 @@
           <a:bodyPr wrap="square" lIns="0" tIns="0" rIns="0" bIns="0" rtlCol="0" anchor="ctr"/>
           <a:lstStyle/>
           <a:p>
-            <a:pPr indent="0" marL="0">
+            <a:pPr marL="0" indent="0">
               <a:buNone/>
             </a:pPr>
             <a:r>
@@ -4436,7 +4464,7 @@
           <a:bodyPr wrap="square" lIns="0" tIns="0" rIns="0" bIns="0" rtlCol="0" anchor="ctr"/>
           <a:lstStyle/>
           <a:p>
-            <a:pPr indent="0" marL="0">
+            <a:pPr marL="0" indent="0">
               <a:lnSpc>
                 <a:spcPct val="120000"/>
               </a:lnSpc>
@@ -4456,7 +4484,7 @@
             <a:endParaRPr lang="en-US" sz="900" dirty="0"/>
           </a:p>
           <a:p>
-            <a:pPr indent="0" marL="0">
+            <a:pPr marL="0" indent="0">
               <a:lnSpc>
                 <a:spcPct val="120000"/>
               </a:lnSpc>
@@ -4496,13 +4524,20 @@
           </a:solidFill>
           <a:ln/>
           <a:effectLst>
-            <a:outerShdw sx="100000" sy="100000" kx="0" ky="0" algn="bl" rotWithShape="0" blurRad="50800" dist="12700" dir="8100000">
+            <a:outerShdw blurRad="50800" dist="12700" dir="8100000" algn="bl" rotWithShape="0">
               <a:srgbClr val="000000">
                 <a:alpha val="8000"/>
               </a:srgbClr>
             </a:outerShdw>
           </a:effectLst>
         </p:spPr>
+        <p:txBody>
+          <a:bodyPr/>
+          <a:lstStyle/>
+          <a:p>
+            <a:endParaRPr lang="en-US"/>
+          </a:p>
+        </p:txBody>
       </p:sp>
       <p:sp>
         <p:nvSpPr>
@@ -4523,18 +4558,25 @@
           </a:solidFill>
           <a:ln/>
         </p:spPr>
+        <p:txBody>
+          <a:bodyPr/>
+          <a:lstStyle/>
+          <a:p>
+            <a:endParaRPr lang="en-US"/>
+          </a:p>
+        </p:txBody>
       </p:sp>
       <p:pic>
         <p:nvPicPr>
-          <p:cNvPr id="30" name="Image 8" descr="preencoded.png">    </p:cNvPr>
+          <p:cNvPr id="30" name="Image 8" descr="preencoded.png"/>
           <p:cNvPicPr>
             <a:picLocks noChangeAspect="1"/>
           </p:cNvPicPr>
           <p:nvPr/>
         </p:nvPicPr>
         <p:blipFill>
-          <a:blip r:embed="rId9"/>
-          <a:srcRect l="0" r="0" t="0" b="0"/>
+          <a:blip r:embed="rId8"/>
+          <a:srcRect/>
           <a:stretch/>
         </p:blipFill>
         <p:spPr>
@@ -4549,15 +4591,15 @@
       </p:pic>
       <p:pic>
         <p:nvPicPr>
-          <p:cNvPr id="31" name="Image 9" descr="preencoded.png">    </p:cNvPr>
+          <p:cNvPr id="31" name="Image 9" descr="preencoded.png"/>
           <p:cNvPicPr>
             <a:picLocks noChangeAspect="1"/>
           </p:cNvPicPr>
           <p:nvPr/>
         </p:nvPicPr>
         <p:blipFill>
-          <a:blip r:embed="rId10"/>
-          <a:srcRect l="0" r="0" t="0" b="0"/>
+          <a:blip r:embed="rId4"/>
+          <a:srcRect/>
           <a:stretch/>
         </p:blipFill>
         <p:spPr>
@@ -4591,7 +4633,7 @@
           <a:bodyPr wrap="square" lIns="0" tIns="0" rIns="0" bIns="0" rtlCol="0" anchor="ctr"/>
           <a:lstStyle/>
           <a:p>
-            <a:pPr indent="0" marL="0">
+            <a:pPr marL="0" indent="0">
               <a:buNone/>
             </a:pPr>
             <a:r>
@@ -4630,7 +4672,7 @@
           <a:bodyPr wrap="square" lIns="0" tIns="0" rIns="0" bIns="0" rtlCol="0" anchor="ctr"/>
           <a:lstStyle/>
           <a:p>
-            <a:pPr indent="0" marL="0">
+            <a:pPr marL="0" indent="0">
               <a:lnSpc>
                 <a:spcPct val="120000"/>
               </a:lnSpc>
@@ -4650,7 +4692,7 @@
             <a:endParaRPr lang="en-US" sz="900" dirty="0"/>
           </a:p>
           <a:p>
-            <a:pPr indent="0" marL="0">
+            <a:pPr marL="0" indent="0">
               <a:lnSpc>
                 <a:spcPct val="120000"/>
               </a:lnSpc>
@@ -4690,13 +4732,20 @@
           </a:solidFill>
           <a:ln/>
           <a:effectLst>
-            <a:outerShdw sx="100000" sy="100000" kx="0" ky="0" algn="bl" rotWithShape="0" blurRad="50800" dist="12700" dir="8100000">
+            <a:outerShdw blurRad="50800" dist="12700" dir="8100000" algn="bl" rotWithShape="0">
               <a:srgbClr val="000000">
                 <a:alpha val="8000"/>
               </a:srgbClr>
             </a:outerShdw>
           </a:effectLst>
         </p:spPr>
+        <p:txBody>
+          <a:bodyPr/>
+          <a:lstStyle/>
+          <a:p>
+            <a:endParaRPr lang="en-US"/>
+          </a:p>
+        </p:txBody>
       </p:sp>
       <p:sp>
         <p:nvSpPr>
@@ -4717,18 +4766,25 @@
           </a:solidFill>
           <a:ln/>
         </p:spPr>
+        <p:txBody>
+          <a:bodyPr/>
+          <a:lstStyle/>
+          <a:p>
+            <a:endParaRPr lang="en-US"/>
+          </a:p>
+        </p:txBody>
       </p:sp>
       <p:pic>
         <p:nvPicPr>
-          <p:cNvPr id="36" name="Image 10" descr="preencoded.png">    </p:cNvPr>
+          <p:cNvPr id="36" name="Image 10" descr="preencoded.png"/>
           <p:cNvPicPr>
             <a:picLocks noChangeAspect="1"/>
           </p:cNvPicPr>
           <p:nvPr/>
         </p:nvPicPr>
         <p:blipFill>
-          <a:blip r:embed="rId11"/>
-          <a:srcRect l="0" r="0" t="0" b="0"/>
+          <a:blip r:embed="rId9"/>
+          <a:srcRect/>
           <a:stretch/>
         </p:blipFill>
         <p:spPr>
@@ -4743,15 +4799,15 @@
       </p:pic>
       <p:pic>
         <p:nvPicPr>
-          <p:cNvPr id="37" name="Image 11" descr="preencoded.png">    </p:cNvPr>
+          <p:cNvPr id="37" name="Image 11" descr="preencoded.png"/>
           <p:cNvPicPr>
             <a:picLocks noChangeAspect="1"/>
           </p:cNvPicPr>
           <p:nvPr/>
         </p:nvPicPr>
         <p:blipFill>
-          <a:blip r:embed="rId12"/>
-          <a:srcRect l="0" r="0" t="0" b="0"/>
+          <a:blip r:embed="rId4"/>
+          <a:srcRect/>
           <a:stretch/>
         </p:blipFill>
         <p:spPr>
@@ -4785,7 +4841,7 @@
           <a:bodyPr wrap="square" lIns="0" tIns="0" rIns="0" bIns="0" rtlCol="0" anchor="ctr"/>
           <a:lstStyle/>
           <a:p>
-            <a:pPr indent="0" marL="0">
+            <a:pPr marL="0" indent="0">
               <a:buNone/>
             </a:pPr>
             <a:r>
@@ -4824,7 +4880,7 @@
           <a:bodyPr wrap="square" lIns="0" tIns="0" rIns="0" bIns="0" rtlCol="0" anchor="ctr"/>
           <a:lstStyle/>
           <a:p>
-            <a:pPr indent="0" marL="0">
+            <a:pPr marL="0" indent="0">
               <a:lnSpc>
                 <a:spcPct val="120000"/>
               </a:lnSpc>
@@ -4844,7 +4900,7 @@
             <a:endParaRPr lang="en-US" sz="900" dirty="0"/>
           </a:p>
           <a:p>
-            <a:pPr indent="0" marL="0">
+            <a:pPr marL="0" indent="0">
               <a:lnSpc>
                 <a:spcPct val="120000"/>
               </a:lnSpc>
@@ -4884,13 +4940,20 @@
           </a:solidFill>
           <a:ln/>
           <a:effectLst>
-            <a:outerShdw sx="100000" sy="100000" kx="0" ky="0" algn="bl" rotWithShape="0" blurRad="50800" dist="12700" dir="8100000">
+            <a:outerShdw blurRad="50800" dist="12700" dir="8100000" algn="bl" rotWithShape="0">
               <a:srgbClr val="000000">
                 <a:alpha val="8000"/>
               </a:srgbClr>
             </a:outerShdw>
           </a:effectLst>
         </p:spPr>
+        <p:txBody>
+          <a:bodyPr/>
+          <a:lstStyle/>
+          <a:p>
+            <a:endParaRPr lang="en-US"/>
+          </a:p>
+        </p:txBody>
       </p:sp>
       <p:sp>
         <p:nvSpPr>
@@ -4911,18 +4974,25 @@
           </a:solidFill>
           <a:ln/>
         </p:spPr>
+        <p:txBody>
+          <a:bodyPr/>
+          <a:lstStyle/>
+          <a:p>
+            <a:endParaRPr lang="en-US"/>
+          </a:p>
+        </p:txBody>
       </p:sp>
       <p:pic>
         <p:nvPicPr>
-          <p:cNvPr id="42" name="Image 12" descr="preencoded.png">    </p:cNvPr>
+          <p:cNvPr id="42" name="Image 12" descr="preencoded.png"/>
           <p:cNvPicPr>
             <a:picLocks noChangeAspect="1"/>
           </p:cNvPicPr>
           <p:nvPr/>
         </p:nvPicPr>
         <p:blipFill>
-          <a:blip r:embed="rId13"/>
-          <a:srcRect l="0" r="0" t="0" b="0"/>
+          <a:blip r:embed="rId10"/>
+          <a:srcRect/>
           <a:stretch/>
         </p:blipFill>
         <p:spPr>
@@ -4937,15 +5007,15 @@
       </p:pic>
       <p:pic>
         <p:nvPicPr>
-          <p:cNvPr id="43" name="Image 13" descr="preencoded.png">    </p:cNvPr>
+          <p:cNvPr id="43" name="Image 13" descr="preencoded.png"/>
           <p:cNvPicPr>
             <a:picLocks noChangeAspect="1"/>
           </p:cNvPicPr>
           <p:nvPr/>
         </p:nvPicPr>
         <p:blipFill>
-          <a:blip r:embed="rId14"/>
-          <a:srcRect l="0" r="0" t="0" b="0"/>
+          <a:blip r:embed="rId4"/>
+          <a:srcRect/>
           <a:stretch/>
         </p:blipFill>
         <p:spPr>
@@ -4979,7 +5049,7 @@
           <a:bodyPr wrap="square" lIns="0" tIns="0" rIns="0" bIns="0" rtlCol="0" anchor="ctr"/>
           <a:lstStyle/>
           <a:p>
-            <a:pPr indent="0" marL="0">
+            <a:pPr marL="0" indent="0">
               <a:buNone/>
             </a:pPr>
             <a:r>
@@ -5018,7 +5088,7 @@
           <a:bodyPr wrap="square" lIns="0" tIns="0" rIns="0" bIns="0" rtlCol="0" anchor="ctr"/>
           <a:lstStyle/>
           <a:p>
-            <a:pPr indent="0" marL="0">
+            <a:pPr marL="0" indent="0">
               <a:lnSpc>
                 <a:spcPct val="120000"/>
               </a:lnSpc>
@@ -5038,7 +5108,7 @@
             <a:endParaRPr lang="en-US" sz="900" dirty="0"/>
           </a:p>
           <a:p>
-            <a:pPr indent="0" marL="0">
+            <a:pPr marL="0" indent="0">
               <a:lnSpc>
                 <a:spcPct val="120000"/>
               </a:lnSpc>
@@ -5078,13 +5148,20 @@
           </a:solidFill>
           <a:ln/>
           <a:effectLst>
-            <a:outerShdw sx="100000" sy="100000" kx="0" ky="0" algn="bl" rotWithShape="0" blurRad="50800" dist="12700" dir="8100000">
+            <a:outerShdw blurRad="50800" dist="12700" dir="8100000" algn="bl" rotWithShape="0">
               <a:srgbClr val="000000">
                 <a:alpha val="8000"/>
               </a:srgbClr>
             </a:outerShdw>
           </a:effectLst>
         </p:spPr>
+        <p:txBody>
+          <a:bodyPr/>
+          <a:lstStyle/>
+          <a:p>
+            <a:endParaRPr lang="en-US"/>
+          </a:p>
+        </p:txBody>
       </p:sp>
       <p:sp>
         <p:nvSpPr>
@@ -5105,18 +5182,25 @@
           </a:solidFill>
           <a:ln/>
         </p:spPr>
+        <p:txBody>
+          <a:bodyPr/>
+          <a:lstStyle/>
+          <a:p>
+            <a:endParaRPr lang="en-US"/>
+          </a:p>
+        </p:txBody>
       </p:sp>
       <p:pic>
         <p:nvPicPr>
-          <p:cNvPr id="48" name="Image 14" descr="preencoded.png">    </p:cNvPr>
+          <p:cNvPr id="48" name="Image 14" descr="preencoded.png"/>
           <p:cNvPicPr>
             <a:picLocks noChangeAspect="1"/>
           </p:cNvPicPr>
           <p:nvPr/>
         </p:nvPicPr>
         <p:blipFill>
-          <a:blip r:embed="rId15"/>
-          <a:srcRect l="0" r="0" t="0" b="0"/>
+          <a:blip r:embed="rId11"/>
+          <a:srcRect/>
           <a:stretch/>
         </p:blipFill>
         <p:spPr>
@@ -5131,15 +5215,15 @@
       </p:pic>
       <p:pic>
         <p:nvPicPr>
-          <p:cNvPr id="49" name="Image 15" descr="preencoded.png">    </p:cNvPr>
+          <p:cNvPr id="49" name="Image 15" descr="preencoded.png"/>
           <p:cNvPicPr>
             <a:picLocks noChangeAspect="1"/>
           </p:cNvPicPr>
           <p:nvPr/>
         </p:nvPicPr>
         <p:blipFill>
-          <a:blip r:embed="rId16"/>
-          <a:srcRect l="0" r="0" t="0" b="0"/>
+          <a:blip r:embed="rId4"/>
+          <a:srcRect/>
           <a:stretch/>
         </p:blipFill>
         <p:spPr>
@@ -5173,7 +5257,7 @@
           <a:bodyPr wrap="square" lIns="0" tIns="0" rIns="0" bIns="0" rtlCol="0" anchor="ctr"/>
           <a:lstStyle/>
           <a:p>
-            <a:pPr indent="0" marL="0">
+            <a:pPr marL="0" indent="0">
               <a:buNone/>
             </a:pPr>
             <a:r>
@@ -5212,7 +5296,7 @@
           <a:bodyPr wrap="square" lIns="0" tIns="0" rIns="0" bIns="0" rtlCol="0" anchor="ctr"/>
           <a:lstStyle/>
           <a:p>
-            <a:pPr indent="0" marL="0">
+            <a:pPr marL="0" indent="0">
               <a:lnSpc>
                 <a:spcPct val="120000"/>
               </a:lnSpc>
@@ -5232,7 +5316,7 @@
             <a:endParaRPr lang="en-US" sz="900" dirty="0"/>
           </a:p>
           <a:p>
-            <a:pPr indent="0" marL="0">
+            <a:pPr marL="0" indent="0">
               <a:lnSpc>
                 <a:spcPct val="120000"/>
               </a:lnSpc>
@@ -5272,6 +5356,13 @@
           </a:solidFill>
           <a:ln/>
         </p:spPr>
+        <p:txBody>
+          <a:bodyPr/>
+          <a:lstStyle/>
+          <a:p>
+            <a:endParaRPr lang="en-US"/>
+          </a:p>
+        </p:txBody>
       </p:sp>
       <p:sp>
         <p:nvSpPr>
@@ -5294,7 +5385,7 @@
           <a:bodyPr wrap="square" lIns="0" tIns="0" rIns="0" bIns="0" rtlCol="0" anchor="ctr"/>
           <a:lstStyle/>
           <a:p>
-            <a:pPr algn="ctr" indent="0" marL="0">
+            <a:pPr marL="0" indent="0" algn="ctr">
               <a:buNone/>
             </a:pPr>
             <a:r>
@@ -5328,6 +5419,7 @@
         <a:solidFill>
           <a:srgbClr val="F8FAFC"/>
         </a:solidFill>
+        <a:effectLst/>
       </p:bgPr>
     </p:bg>
     <p:spTree>
@@ -5363,6 +5455,13 @@
           </a:solidFill>
           <a:ln/>
         </p:spPr>
+        <p:txBody>
+          <a:bodyPr/>
+          <a:lstStyle/>
+          <a:p>
+            <a:endParaRPr lang="en-US"/>
+          </a:p>
+        </p:txBody>
       </p:sp>
       <p:sp>
         <p:nvSpPr>
@@ -5385,7 +5484,7 @@
           <a:bodyPr wrap="square" lIns="0" tIns="0" rIns="0" bIns="0" rtlCol="0" anchor="ctr"/>
           <a:lstStyle/>
           <a:p>
-            <a:pPr indent="0" marL="0">
+            <a:pPr marL="0" indent="0">
               <a:buNone/>
             </a:pPr>
             <a:r>
@@ -5422,13 +5521,20 @@
           </a:solidFill>
           <a:ln/>
           <a:effectLst>
-            <a:outerShdw sx="100000" sy="100000" kx="0" ky="0" algn="bl" rotWithShape="0" blurRad="50800" dist="12700" dir="8100000">
+            <a:outerShdw blurRad="50800" dist="12700" dir="8100000" algn="bl" rotWithShape="0">
               <a:srgbClr val="000000">
                 <a:alpha val="8000"/>
               </a:srgbClr>
             </a:outerShdw>
           </a:effectLst>
         </p:spPr>
+        <p:txBody>
+          <a:bodyPr/>
+          <a:lstStyle/>
+          <a:p>
+            <a:endParaRPr lang="en-US"/>
+          </a:p>
+        </p:txBody>
       </p:sp>
       <p:sp>
         <p:nvSpPr>
@@ -5449,6 +5555,13 @@
           </a:solidFill>
           <a:ln/>
         </p:spPr>
+        <p:txBody>
+          <a:bodyPr/>
+          <a:lstStyle/>
+          <a:p>
+            <a:endParaRPr lang="en-US"/>
+          </a:p>
+        </p:txBody>
       </p:sp>
       <p:sp>
         <p:nvSpPr>
@@ -5471,7 +5584,7 @@
           <a:bodyPr wrap="square" lIns="0" tIns="0" rIns="0" bIns="0" rtlCol="0" anchor="ctr"/>
           <a:lstStyle/>
           <a:p>
-            <a:pPr indent="0" marL="0">
+            <a:pPr marL="0" indent="0">
               <a:buNone/>
             </a:pPr>
             <a:r>
@@ -5510,7 +5623,7 @@
           <a:bodyPr wrap="square" lIns="0" tIns="0" rIns="0" bIns="0" rtlCol="0" anchor="ctr"/>
           <a:lstStyle/>
           <a:p>
-            <a:pPr indent="0" marL="0">
+            <a:pPr marL="0" indent="0">
               <a:lnSpc>
                 <a:spcPct val="120000"/>
               </a:lnSpc>
@@ -5550,6 +5663,13 @@
           </a:solidFill>
           <a:ln/>
         </p:spPr>
+        <p:txBody>
+          <a:bodyPr/>
+          <a:lstStyle/>
+          <a:p>
+            <a:endParaRPr lang="en-US"/>
+          </a:p>
+        </p:txBody>
       </p:sp>
       <p:sp>
         <p:nvSpPr>
@@ -5572,7 +5692,7 @@
           <a:bodyPr wrap="square" lIns="0" tIns="0" rIns="0" bIns="0" rtlCol="0" anchor="ctr"/>
           <a:lstStyle/>
           <a:p>
-            <a:pPr indent="0" marL="0">
+            <a:pPr marL="0" indent="0">
               <a:buNone/>
             </a:pPr>
             <a:r>
@@ -5611,7 +5731,7 @@
           <a:bodyPr wrap="square" lIns="0" tIns="0" rIns="0" bIns="0" rtlCol="0" anchor="ctr"/>
           <a:lstStyle/>
           <a:p>
-            <a:pPr indent="0" marL="0">
+            <a:pPr marL="0" indent="0">
               <a:buNone/>
             </a:pPr>
             <a:r>
@@ -5650,7 +5770,7 @@
           <a:bodyPr wrap="square" lIns="0" tIns="0" rIns="0" bIns="0" rtlCol="0" anchor="ctr"/>
           <a:lstStyle/>
           <a:p>
-            <a:pPr algn="ctr" indent="0" marL="0">
+            <a:pPr marL="0" indent="0" algn="ctr">
               <a:buNone/>
             </a:pPr>
             <a:r>
@@ -5687,6 +5807,13 @@
           </a:solidFill>
           <a:ln/>
         </p:spPr>
+        <p:txBody>
+          <a:bodyPr/>
+          <a:lstStyle/>
+          <a:p>
+            <a:endParaRPr lang="en-US"/>
+          </a:p>
+        </p:txBody>
       </p:sp>
       <p:sp>
         <p:nvSpPr>
@@ -5709,7 +5836,7 @@
           <a:bodyPr wrap="square" lIns="0" tIns="0" rIns="0" bIns="0" rtlCol="0" anchor="ctr"/>
           <a:lstStyle/>
           <a:p>
-            <a:pPr indent="0" marL="0">
+            <a:pPr marL="0" indent="0">
               <a:buNone/>
             </a:pPr>
             <a:r>
@@ -5748,7 +5875,7 @@
           <a:bodyPr wrap="square" lIns="0" tIns="0" rIns="0" bIns="0" rtlCol="0" anchor="ctr"/>
           <a:lstStyle/>
           <a:p>
-            <a:pPr indent="0" marL="0">
+            <a:pPr marL="0" indent="0">
               <a:buNone/>
             </a:pPr>
             <a:r>
@@ -5785,13 +5912,20 @@
           </a:solidFill>
           <a:ln/>
           <a:effectLst>
-            <a:outerShdw sx="100000" sy="100000" kx="0" ky="0" algn="bl" rotWithShape="0" blurRad="50800" dist="12700" dir="8100000">
+            <a:outerShdw blurRad="50800" dist="12700" dir="8100000" algn="bl" rotWithShape="0">
               <a:srgbClr val="000000">
                 <a:alpha val="8000"/>
               </a:srgbClr>
             </a:outerShdw>
           </a:effectLst>
         </p:spPr>
+        <p:txBody>
+          <a:bodyPr/>
+          <a:lstStyle/>
+          <a:p>
+            <a:endParaRPr lang="en-US"/>
+          </a:p>
+        </p:txBody>
       </p:sp>
       <p:sp>
         <p:nvSpPr>
@@ -5812,6 +5946,13 @@
           </a:solidFill>
           <a:ln/>
         </p:spPr>
+        <p:txBody>
+          <a:bodyPr/>
+          <a:lstStyle/>
+          <a:p>
+            <a:endParaRPr lang="en-US"/>
+          </a:p>
+        </p:txBody>
       </p:sp>
       <p:sp>
         <p:nvSpPr>
@@ -5834,7 +5975,7 @@
           <a:bodyPr wrap="square" lIns="0" tIns="0" rIns="0" bIns="0" rtlCol="0" anchor="ctr"/>
           <a:lstStyle/>
           <a:p>
-            <a:pPr indent="0" marL="0">
+            <a:pPr marL="0" indent="0">
               <a:buNone/>
             </a:pPr>
             <a:r>
@@ -5873,7 +6014,7 @@
           <a:bodyPr wrap="square" lIns="0" tIns="0" rIns="0" bIns="0" rtlCol="0" anchor="ctr"/>
           <a:lstStyle/>
           <a:p>
-            <a:pPr indent="0" marL="0">
+            <a:pPr marL="0" indent="0">
               <a:lnSpc>
                 <a:spcPct val="120000"/>
               </a:lnSpc>
@@ -5913,6 +6054,13 @@
           </a:solidFill>
           <a:ln/>
         </p:spPr>
+        <p:txBody>
+          <a:bodyPr/>
+          <a:lstStyle/>
+          <a:p>
+            <a:endParaRPr lang="en-US"/>
+          </a:p>
+        </p:txBody>
       </p:sp>
       <p:sp>
         <p:nvSpPr>
@@ -5935,7 +6083,7 @@
           <a:bodyPr wrap="square" lIns="0" tIns="0" rIns="0" bIns="0" rtlCol="0" anchor="ctr"/>
           <a:lstStyle/>
           <a:p>
-            <a:pPr indent="0" marL="0">
+            <a:pPr marL="0" indent="0">
               <a:buNone/>
             </a:pPr>
             <a:r>
@@ -5974,7 +6122,7 @@
           <a:bodyPr wrap="square" lIns="0" tIns="0" rIns="0" bIns="0" rtlCol="0" anchor="ctr"/>
           <a:lstStyle/>
           <a:p>
-            <a:pPr indent="0" marL="0">
+            <a:pPr marL="0" indent="0">
               <a:buNone/>
             </a:pPr>
             <a:r>
@@ -6013,7 +6161,7 @@
           <a:bodyPr wrap="square" lIns="0" tIns="0" rIns="0" bIns="0" rtlCol="0" anchor="ctr"/>
           <a:lstStyle/>
           <a:p>
-            <a:pPr algn="ctr" indent="0" marL="0">
+            <a:pPr marL="0" indent="0" algn="ctr">
               <a:buNone/>
             </a:pPr>
             <a:r>
@@ -6050,6 +6198,13 @@
           </a:solidFill>
           <a:ln/>
         </p:spPr>
+        <p:txBody>
+          <a:bodyPr/>
+          <a:lstStyle/>
+          <a:p>
+            <a:endParaRPr lang="en-US"/>
+          </a:p>
+        </p:txBody>
       </p:sp>
       <p:sp>
         <p:nvSpPr>
@@ -6072,7 +6227,7 @@
           <a:bodyPr wrap="square" lIns="0" tIns="0" rIns="0" bIns="0" rtlCol="0" anchor="ctr"/>
           <a:lstStyle/>
           <a:p>
-            <a:pPr indent="0" marL="0">
+            <a:pPr marL="0" indent="0">
               <a:buNone/>
             </a:pPr>
             <a:r>
@@ -6111,7 +6266,7 @@
           <a:bodyPr wrap="square" lIns="0" tIns="0" rIns="0" bIns="0" rtlCol="0" anchor="ctr"/>
           <a:lstStyle/>
           <a:p>
-            <a:pPr indent="0" marL="0">
+            <a:pPr marL="0" indent="0">
               <a:buNone/>
             </a:pPr>
             <a:r>
@@ -6148,13 +6303,20 @@
           </a:solidFill>
           <a:ln/>
           <a:effectLst>
-            <a:outerShdw sx="100000" sy="100000" kx="0" ky="0" algn="bl" rotWithShape="0" blurRad="50800" dist="12700" dir="8100000">
+            <a:outerShdw blurRad="50800" dist="12700" dir="8100000" algn="bl" rotWithShape="0">
               <a:srgbClr val="000000">
                 <a:alpha val="8000"/>
               </a:srgbClr>
             </a:outerShdw>
           </a:effectLst>
         </p:spPr>
+        <p:txBody>
+          <a:bodyPr/>
+          <a:lstStyle/>
+          <a:p>
+            <a:endParaRPr lang="en-US"/>
+          </a:p>
+        </p:txBody>
       </p:sp>
       <p:sp>
         <p:nvSpPr>
@@ -6175,6 +6337,13 @@
           </a:solidFill>
           <a:ln/>
         </p:spPr>
+        <p:txBody>
+          <a:bodyPr/>
+          <a:lstStyle/>
+          <a:p>
+            <a:endParaRPr lang="en-US"/>
+          </a:p>
+        </p:txBody>
       </p:sp>
       <p:sp>
         <p:nvSpPr>
@@ -6197,7 +6366,7 @@
           <a:bodyPr wrap="square" lIns="0" tIns="0" rIns="0" bIns="0" rtlCol="0" anchor="ctr"/>
           <a:lstStyle/>
           <a:p>
-            <a:pPr indent="0" marL="0">
+            <a:pPr marL="0" indent="0">
               <a:buNone/>
             </a:pPr>
             <a:r>
@@ -6236,7 +6405,7 @@
           <a:bodyPr wrap="square" lIns="0" tIns="0" rIns="0" bIns="0" rtlCol="0" anchor="ctr"/>
           <a:lstStyle/>
           <a:p>
-            <a:pPr indent="0" marL="0">
+            <a:pPr marL="0" indent="0">
               <a:lnSpc>
                 <a:spcPct val="120000"/>
               </a:lnSpc>
@@ -6276,6 +6445,13 @@
           </a:solidFill>
           <a:ln/>
         </p:spPr>
+        <p:txBody>
+          <a:bodyPr/>
+          <a:lstStyle/>
+          <a:p>
+            <a:endParaRPr lang="en-US"/>
+          </a:p>
+        </p:txBody>
       </p:sp>
       <p:sp>
         <p:nvSpPr>
@@ -6298,7 +6474,7 @@
           <a:bodyPr wrap="square" lIns="0" tIns="0" rIns="0" bIns="0" rtlCol="0" anchor="ctr"/>
           <a:lstStyle/>
           <a:p>
-            <a:pPr indent="0" marL="0">
+            <a:pPr marL="0" indent="0">
               <a:buNone/>
             </a:pPr>
             <a:r>
@@ -6337,7 +6513,7 @@
           <a:bodyPr wrap="square" lIns="0" tIns="0" rIns="0" bIns="0" rtlCol="0" anchor="ctr"/>
           <a:lstStyle/>
           <a:p>
-            <a:pPr indent="0" marL="0">
+            <a:pPr marL="0" indent="0">
               <a:buNone/>
             </a:pPr>
             <a:r>
@@ -6376,7 +6552,7 @@
           <a:bodyPr wrap="square" lIns="0" tIns="0" rIns="0" bIns="0" rtlCol="0" anchor="ctr"/>
           <a:lstStyle/>
           <a:p>
-            <a:pPr algn="ctr" indent="0" marL="0">
+            <a:pPr marL="0" indent="0" algn="ctr">
               <a:buNone/>
             </a:pPr>
             <a:r>
@@ -6413,6 +6589,13 @@
           </a:solidFill>
           <a:ln/>
         </p:spPr>
+        <p:txBody>
+          <a:bodyPr/>
+          <a:lstStyle/>
+          <a:p>
+            <a:endParaRPr lang="en-US"/>
+          </a:p>
+        </p:txBody>
       </p:sp>
       <p:sp>
         <p:nvSpPr>
@@ -6435,7 +6618,7 @@
           <a:bodyPr wrap="square" lIns="0" tIns="0" rIns="0" bIns="0" rtlCol="0" anchor="ctr"/>
           <a:lstStyle/>
           <a:p>
-            <a:pPr indent="0" marL="0">
+            <a:pPr marL="0" indent="0">
               <a:buNone/>
             </a:pPr>
             <a:r>
@@ -6474,7 +6657,7 @@
           <a:bodyPr wrap="square" lIns="0" tIns="0" rIns="0" bIns="0" rtlCol="0" anchor="ctr"/>
           <a:lstStyle/>
           <a:p>
-            <a:pPr indent="0" marL="0">
+            <a:pPr marL="0" indent="0">
               <a:buNone/>
             </a:pPr>
             <a:r>
@@ -6508,6 +6691,7 @@
         <a:solidFill>
           <a:srgbClr val="F8FAFC"/>
         </a:solidFill>
+        <a:effectLst/>
       </p:bgPr>
     </p:bg>
     <p:spTree>
@@ -6543,6 +6727,13 @@
           </a:solidFill>
           <a:ln/>
         </p:spPr>
+        <p:txBody>
+          <a:bodyPr/>
+          <a:lstStyle/>
+          <a:p>
+            <a:endParaRPr lang="en-US"/>
+          </a:p>
+        </p:txBody>
       </p:sp>
       <p:sp>
         <p:nvSpPr>
@@ -6565,7 +6756,7 @@
           <a:bodyPr wrap="square" lIns="0" tIns="0" rIns="0" bIns="0" rtlCol="0" anchor="ctr"/>
           <a:lstStyle/>
           <a:p>
-            <a:pPr indent="0" marL="0">
+            <a:pPr marL="0" indent="0">
               <a:buNone/>
             </a:pPr>
             <a:r>
@@ -6602,13 +6793,20 @@
           </a:solidFill>
           <a:ln/>
           <a:effectLst>
-            <a:outerShdw sx="100000" sy="100000" kx="0" ky="0" algn="bl" rotWithShape="0" blurRad="76200" dist="25400" dir="8100000">
+            <a:outerShdw blurRad="76200" dist="25400" dir="8100000" algn="bl" rotWithShape="0">
               <a:srgbClr val="000000">
                 <a:alpha val="12000"/>
               </a:srgbClr>
             </a:outerShdw>
           </a:effectLst>
         </p:spPr>
+        <p:txBody>
+          <a:bodyPr/>
+          <a:lstStyle/>
+          <a:p>
+            <a:endParaRPr lang="en-US"/>
+          </a:p>
+        </p:txBody>
       </p:sp>
       <p:sp>
         <p:nvSpPr>
@@ -6631,18 +6829,25 @@
           </a:solidFill>
           <a:ln/>
         </p:spPr>
+        <p:txBody>
+          <a:bodyPr/>
+          <a:lstStyle/>
+          <a:p>
+            <a:endParaRPr lang="en-US"/>
+          </a:p>
+        </p:txBody>
       </p:sp>
       <p:pic>
         <p:nvPicPr>
-          <p:cNvPr id="6" name="Image 0" descr="preencoded.png">    </p:cNvPr>
+          <p:cNvPr id="6" name="Image 0" descr="preencoded.png"/>
           <p:cNvPicPr>
             <a:picLocks noChangeAspect="1"/>
           </p:cNvPicPr>
           <p:nvPr/>
         </p:nvPicPr>
         <p:blipFill>
-          <a:blip r:embed="rId1"/>
-          <a:srcRect l="0" r="0" t="0" b="0"/>
+          <a:blip r:embed="rId3"/>
+          <a:srcRect/>
           <a:stretch/>
         </p:blipFill>
         <p:spPr>
@@ -6676,7 +6881,7 @@
           <a:bodyPr wrap="square" lIns="0" tIns="0" rIns="0" bIns="0" rtlCol="0" anchor="ctr"/>
           <a:lstStyle/>
           <a:p>
-            <a:pPr algn="ctr" indent="0" marL="0">
+            <a:pPr marL="0" indent="0" algn="ctr">
               <a:buNone/>
             </a:pPr>
             <a:r>
@@ -6715,7 +6920,7 @@
           <a:bodyPr wrap="square" lIns="0" tIns="0" rIns="0" bIns="0" rtlCol="0" anchor="ctr"/>
           <a:lstStyle/>
           <a:p>
-            <a:pPr algn="ctr" indent="0" marL="0">
+            <a:pPr marL="0" indent="0" algn="ctr">
               <a:buNone/>
             </a:pPr>
             <a:r>
@@ -6752,13 +6957,20 @@
           </a:solidFill>
           <a:ln/>
           <a:effectLst>
-            <a:outerShdw sx="100000" sy="100000" kx="0" ky="0" algn="bl" rotWithShape="0" blurRad="50800" dist="12700" dir="8100000">
+            <a:outerShdw blurRad="50800" dist="12700" dir="8100000" algn="bl" rotWithShape="0">
               <a:srgbClr val="000000">
                 <a:alpha val="8000"/>
               </a:srgbClr>
             </a:outerShdw>
           </a:effectLst>
         </p:spPr>
+        <p:txBody>
+          <a:bodyPr/>
+          <a:lstStyle/>
+          <a:p>
+            <a:endParaRPr lang="en-US"/>
+          </a:p>
+        </p:txBody>
       </p:sp>
       <p:sp>
         <p:nvSpPr>
@@ -6779,6 +6991,13 @@
           </a:solidFill>
           <a:ln/>
         </p:spPr>
+        <p:txBody>
+          <a:bodyPr/>
+          <a:lstStyle/>
+          <a:p>
+            <a:endParaRPr lang="en-US"/>
+          </a:p>
+        </p:txBody>
       </p:sp>
       <p:sp>
         <p:nvSpPr>
@@ -6801,7 +7020,7 @@
           <a:bodyPr wrap="square" lIns="0" tIns="0" rIns="0" bIns="0" rtlCol="0" anchor="ctr"/>
           <a:lstStyle/>
           <a:p>
-            <a:pPr indent="0" marL="0">
+            <a:pPr marL="0" indent="0">
               <a:buNone/>
             </a:pPr>
             <a:r>
@@ -6840,7 +7059,7 @@
           <a:bodyPr wrap="square" lIns="0" tIns="0" rIns="0" bIns="0" rtlCol="0" anchor="ctr"/>
           <a:lstStyle/>
           <a:p>
-            <a:pPr indent="0" marL="0">
+            <a:pPr marL="0" indent="0">
               <a:buNone/>
             </a:pPr>
             <a:r>
@@ -6877,13 +7096,20 @@
           </a:solidFill>
           <a:ln/>
           <a:effectLst>
-            <a:outerShdw sx="100000" sy="100000" kx="0" ky="0" algn="bl" rotWithShape="0" blurRad="50800" dist="12700" dir="8100000">
+            <a:outerShdw blurRad="50800" dist="12700" dir="8100000" algn="bl" rotWithShape="0">
               <a:srgbClr val="000000">
                 <a:alpha val="8000"/>
               </a:srgbClr>
             </a:outerShdw>
           </a:effectLst>
         </p:spPr>
+        <p:txBody>
+          <a:bodyPr/>
+          <a:lstStyle/>
+          <a:p>
+            <a:endParaRPr lang="en-US"/>
+          </a:p>
+        </p:txBody>
       </p:sp>
       <p:sp>
         <p:nvSpPr>
@@ -6904,6 +7130,13 @@
           </a:solidFill>
           <a:ln/>
         </p:spPr>
+        <p:txBody>
+          <a:bodyPr/>
+          <a:lstStyle/>
+          <a:p>
+            <a:endParaRPr lang="en-US"/>
+          </a:p>
+        </p:txBody>
       </p:sp>
       <p:sp>
         <p:nvSpPr>
@@ -6926,7 +7159,7 @@
           <a:bodyPr wrap="square" lIns="0" tIns="0" rIns="0" bIns="0" rtlCol="0" anchor="ctr"/>
           <a:lstStyle/>
           <a:p>
-            <a:pPr indent="0" marL="0">
+            <a:pPr marL="0" indent="0">
               <a:buNone/>
             </a:pPr>
             <a:r>
@@ -6965,7 +7198,7 @@
           <a:bodyPr wrap="square" lIns="0" tIns="0" rIns="0" bIns="0" rtlCol="0" anchor="ctr"/>
           <a:lstStyle/>
           <a:p>
-            <a:pPr indent="0" marL="0">
+            <a:pPr marL="0" indent="0">
               <a:buNone/>
             </a:pPr>
             <a:r>
@@ -7002,13 +7235,20 @@
           </a:solidFill>
           <a:ln/>
           <a:effectLst>
-            <a:outerShdw sx="100000" sy="100000" kx="0" ky="0" algn="bl" rotWithShape="0" blurRad="50800" dist="12700" dir="8100000">
+            <a:outerShdw blurRad="50800" dist="12700" dir="8100000" algn="bl" rotWithShape="0">
               <a:srgbClr val="000000">
                 <a:alpha val="8000"/>
               </a:srgbClr>
             </a:outerShdw>
           </a:effectLst>
         </p:spPr>
+        <p:txBody>
+          <a:bodyPr/>
+          <a:lstStyle/>
+          <a:p>
+            <a:endParaRPr lang="en-US"/>
+          </a:p>
+        </p:txBody>
       </p:sp>
       <p:sp>
         <p:nvSpPr>
@@ -7029,6 +7269,13 @@
           </a:solidFill>
           <a:ln/>
         </p:spPr>
+        <p:txBody>
+          <a:bodyPr/>
+          <a:lstStyle/>
+          <a:p>
+            <a:endParaRPr lang="en-US"/>
+          </a:p>
+        </p:txBody>
       </p:sp>
       <p:sp>
         <p:nvSpPr>
@@ -7051,7 +7298,7 @@
           <a:bodyPr wrap="square" lIns="0" tIns="0" rIns="0" bIns="0" rtlCol="0" anchor="ctr"/>
           <a:lstStyle/>
           <a:p>
-            <a:pPr indent="0" marL="0">
+            <a:pPr marL="0" indent="0">
               <a:buNone/>
             </a:pPr>
             <a:r>
@@ -7090,7 +7337,7 @@
           <a:bodyPr wrap="square" lIns="0" tIns="0" rIns="0" bIns="0" rtlCol="0" anchor="ctr"/>
           <a:lstStyle/>
           <a:p>
-            <a:pPr indent="0" marL="0">
+            <a:pPr marL="0" indent="0">
               <a:buNone/>
             </a:pPr>
             <a:r>
@@ -7127,13 +7374,20 @@
           </a:solidFill>
           <a:ln/>
           <a:effectLst>
-            <a:outerShdw sx="100000" sy="100000" kx="0" ky="0" algn="bl" rotWithShape="0" blurRad="50800" dist="12700" dir="8100000">
+            <a:outerShdw blurRad="50800" dist="12700" dir="8100000" algn="bl" rotWithShape="0">
               <a:srgbClr val="000000">
                 <a:alpha val="8000"/>
               </a:srgbClr>
             </a:outerShdw>
           </a:effectLst>
         </p:spPr>
+        <p:txBody>
+          <a:bodyPr/>
+          <a:lstStyle/>
+          <a:p>
+            <a:endParaRPr lang="en-US"/>
+          </a:p>
+        </p:txBody>
       </p:sp>
       <p:sp>
         <p:nvSpPr>
@@ -7154,6 +7408,13 @@
           </a:solidFill>
           <a:ln/>
         </p:spPr>
+        <p:txBody>
+          <a:bodyPr/>
+          <a:lstStyle/>
+          <a:p>
+            <a:endParaRPr lang="en-US"/>
+          </a:p>
+        </p:txBody>
       </p:sp>
       <p:sp>
         <p:nvSpPr>
@@ -7176,7 +7437,7 @@
           <a:bodyPr wrap="square" lIns="0" tIns="0" rIns="0" bIns="0" rtlCol="0" anchor="ctr"/>
           <a:lstStyle/>
           <a:p>
-            <a:pPr indent="0" marL="0">
+            <a:pPr marL="0" indent="0">
               <a:buNone/>
             </a:pPr>
             <a:r>
@@ -7215,7 +7476,7 @@
           <a:bodyPr wrap="square" lIns="0" tIns="0" rIns="0" bIns="0" rtlCol="0" anchor="ctr"/>
           <a:lstStyle/>
           <a:p>
-            <a:pPr indent="0" marL="0">
+            <a:pPr marL="0" indent="0">
               <a:buNone/>
             </a:pPr>
             <a:r>
@@ -7249,6 +7510,7 @@
         <a:solidFill>
           <a:srgbClr val="1B2A4A"/>
         </a:solidFill>
+        <a:effectLst/>
       </p:bgPr>
     </p:bg>
     <p:spTree>
@@ -7284,6 +7546,13 @@
           </a:solidFill>
           <a:ln/>
         </p:spPr>
+        <p:txBody>
+          <a:bodyPr/>
+          <a:lstStyle/>
+          <a:p>
+            <a:endParaRPr lang="en-US"/>
+          </a:p>
+        </p:txBody>
       </p:sp>
       <p:sp>
         <p:nvSpPr>
@@ -7306,7 +7575,7 @@
           <a:bodyPr wrap="square" lIns="0" tIns="0" rIns="0" bIns="0" rtlCol="0" anchor="ctr"/>
           <a:lstStyle/>
           <a:p>
-            <a:pPr indent="0" marL="0">
+            <a:pPr marL="0" indent="0">
               <a:buNone/>
             </a:pPr>
             <a:r>
@@ -7343,6 +7612,13 @@
           </a:solidFill>
           <a:ln/>
         </p:spPr>
+        <p:txBody>
+          <a:bodyPr/>
+          <a:lstStyle/>
+          <a:p>
+            <a:endParaRPr lang="en-US"/>
+          </a:p>
+        </p:txBody>
       </p:sp>
       <p:sp>
         <p:nvSpPr>
@@ -7365,7 +7641,7 @@
           <a:bodyPr wrap="square" lIns="0" tIns="0" rIns="0" bIns="0" rtlCol="0" anchor="ctr"/>
           <a:lstStyle/>
           <a:p>
-            <a:pPr indent="0" marL="0">
+            <a:pPr marL="0" indent="0">
               <a:buNone/>
             </a:pPr>
             <a:r>
@@ -7404,7 +7680,7 @@
           <a:bodyPr wrap="square" lIns="0" tIns="0" rIns="0" bIns="0" rtlCol="0" anchor="ctr"/>
           <a:lstStyle/>
           <a:p>
-            <a:pPr indent="0" marL="0">
+            <a:pPr marL="0" indent="0">
               <a:lnSpc>
                 <a:spcPct val="160000"/>
               </a:lnSpc>
@@ -7421,12 +7697,6 @@
               </a:rPr>
               <a:t>Classify</a:t>
             </a:r>
-            <a:pPr indent="0" marL="0">
-              <a:lnSpc>
-                <a:spcPct val="160000"/>
-              </a:lnSpc>
-              <a:buNone/>
-            </a:pPr>
             <a:r>
               <a:rPr lang="en-US" sz="1400" dirty="0">
                 <a:solidFill>
@@ -7439,12 +7709,6 @@
               <a:t>  documents with ensemble AI
 </a:t>
             </a:r>
-            <a:pPr indent="0" marL="0">
-              <a:lnSpc>
-                <a:spcPct val="160000"/>
-              </a:lnSpc>
-              <a:buNone/>
-            </a:pPr>
             <a:r>
               <a:rPr lang="en-US" sz="1400" b="1" dirty="0">
                 <a:solidFill>
@@ -7456,12 +7720,6 @@
               </a:rPr>
               <a:t>Summarize</a:t>
             </a:r>
-            <a:pPr indent="0" marL="0">
-              <a:lnSpc>
-                <a:spcPct val="160000"/>
-              </a:lnSpc>
-              <a:buNone/>
-            </a:pPr>
             <a:r>
               <a:rPr lang="en-US" sz="1400" dirty="0">
                 <a:solidFill>
@@ -7474,12 +7732,6 @@
               <a:t>  with key entity extraction
 </a:t>
             </a:r>
-            <a:pPr indent="0" marL="0">
-              <a:lnSpc>
-                <a:spcPct val="160000"/>
-              </a:lnSpc>
-              <a:buNone/>
-            </a:pPr>
             <a:r>
               <a:rPr lang="en-US" sz="1400" b="1" dirty="0">
                 <a:solidFill>
@@ -7491,12 +7743,6 @@
               </a:rPr>
               <a:t>Route</a:t>
             </a:r>
-            <a:pPr indent="0" marL="0">
-              <a:lnSpc>
-                <a:spcPct val="160000"/>
-              </a:lnSpc>
-              <a:buNone/>
-            </a:pPr>
             <a:r>
               <a:rPr lang="en-US" sz="1400" dirty="0">
                 <a:solidFill>
@@ -7509,12 +7755,6 @@
               <a:t>  automatically across departments
 </a:t>
             </a:r>
-            <a:pPr indent="0" marL="0">
-              <a:lnSpc>
-                <a:spcPct val="160000"/>
-              </a:lnSpc>
-              <a:buNone/>
-            </a:pPr>
             <a:r>
               <a:rPr lang="en-US" sz="1400" b="1" dirty="0">
                 <a:solidFill>
@@ -7526,12 +7766,6 @@
               </a:rPr>
               <a:t>Track</a:t>
             </a:r>
-            <a:pPr indent="0" marL="0">
-              <a:lnSpc>
-                <a:spcPct val="160000"/>
-              </a:lnSpc>
-              <a:buNone/>
-            </a:pPr>
             <a:r>
               <a:rPr lang="en-US" sz="1400" dirty="0">
                 <a:solidFill>
@@ -7544,12 +7778,6 @@
               <a:t>  in real-time from the citizen's phone
 </a:t>
             </a:r>
-            <a:pPr indent="0" marL="0">
-              <a:lnSpc>
-                <a:spcPct val="160000"/>
-              </a:lnSpc>
-              <a:buNone/>
-            </a:pPr>
             <a:r>
               <a:rPr lang="en-US" sz="1400" b="1" dirty="0">
                 <a:solidFill>
@@ -7561,12 +7789,6 @@
               </a:rPr>
               <a:t>Secure</a:t>
             </a:r>
-            <a:pPr indent="0" marL="0">
-              <a:lnSpc>
-                <a:spcPct val="160000"/>
-              </a:lnSpc>
-              <a:buNone/>
-            </a:pPr>
             <a:r>
               <a:rPr lang="en-US" sz="1400" dirty="0">
                 <a:solidFill>
@@ -7603,7 +7825,7 @@
           <a:bodyPr wrap="square" lIns="0" tIns="0" rIns="0" bIns="0" rtlCol="0" anchor="ctr"/>
           <a:lstStyle/>
           <a:p>
-            <a:pPr indent="0" marL="0">
+            <a:pPr marL="0" indent="0">
               <a:buNone/>
             </a:pPr>
             <a:r>
@@ -7922,4 +8144,319 @@
     </a:ext>
   </a:extLst>
 </a:theme>
+</file>
+
+<file path=ppt/theme/theme2.xml><?xml version="1.0" encoding="utf-8"?>
+<a:theme xmlns:a="http://schemas.openxmlformats.org/drawingml/2006/main" name="Office Theme">
+  <a:themeElements>
+    <a:clrScheme name="Office">
+      <a:dk1>
+        <a:sysClr val="windowText" lastClr="000000"/>
+      </a:dk1>
+      <a:lt1>
+        <a:sysClr val="window" lastClr="FFFFFF"/>
+      </a:lt1>
+      <a:dk2>
+        <a:srgbClr val="0E2841"/>
+      </a:dk2>
+      <a:lt2>
+        <a:srgbClr val="E8E8E8"/>
+      </a:lt2>
+      <a:accent1>
+        <a:srgbClr val="156082"/>
+      </a:accent1>
+      <a:accent2>
+        <a:srgbClr val="E97132"/>
+      </a:accent2>
+      <a:accent3>
+        <a:srgbClr val="196B24"/>
+      </a:accent3>
+      <a:accent4>
+        <a:srgbClr val="0F9ED5"/>
+      </a:accent4>
+      <a:accent5>
+        <a:srgbClr val="A02B93"/>
+      </a:accent5>
+      <a:accent6>
+        <a:srgbClr val="4EA72E"/>
+      </a:accent6>
+      <a:hlink>
+        <a:srgbClr val="467886"/>
+      </a:hlink>
+      <a:folHlink>
+        <a:srgbClr val="96607D"/>
+      </a:folHlink>
+    </a:clrScheme>
+    <a:fontScheme name="Office">
+      <a:majorFont>
+        <a:latin typeface="Aptos Display" panose="02110004020202020204"/>
+        <a:ea typeface=""/>
+        <a:cs typeface=""/>
+        <a:font script="Jpan" typeface="游ゴシック Light"/>
+        <a:font script="Hang" typeface="맑은 고딕"/>
+        <a:font script="Hans" typeface="等线 Light"/>
+        <a:font script="Hant" typeface="新細明體"/>
+        <a:font script="Arab" typeface="Times New Roman"/>
+        <a:font script="Hebr" typeface="Times New Roman"/>
+        <a:font script="Thai" typeface="Angsana New"/>
+        <a:font script="Ethi" typeface="Nyala"/>
+        <a:font script="Beng" typeface="Vrinda"/>
+        <a:font script="Gujr" typeface="Shruti"/>
+        <a:font script="Khmr" typeface="MoolBoran"/>
+        <a:font script="Knda" typeface="Tunga"/>
+        <a:font script="Guru" typeface="Raavi"/>
+        <a:font script="Cans" typeface="Euphemia"/>
+        <a:font script="Cher" typeface="Plantagenet Cherokee"/>
+        <a:font script="Yiii" typeface="Microsoft Yi Baiti"/>
+        <a:font script="Tibt" typeface="Microsoft Himalaya"/>
+        <a:font script="Thaa" typeface="MV Boli"/>
+        <a:font script="Deva" typeface="Mangal"/>
+        <a:font script="Telu" typeface="Gautami"/>
+        <a:font script="Taml" typeface="Latha"/>
+        <a:font script="Syrc" typeface="Estrangelo Edessa"/>
+        <a:font script="Orya" typeface="Kalinga"/>
+        <a:font script="Mlym" typeface="Kartika"/>
+        <a:font script="Laoo" typeface="DokChampa"/>
+        <a:font script="Sinh" typeface="Iskoola Pota"/>
+        <a:font script="Mong" typeface="Mongolian Baiti"/>
+        <a:font script="Viet" typeface="Times New Roman"/>
+        <a:font script="Uigh" typeface="Microsoft Uighur"/>
+        <a:font script="Geor" typeface="Sylfaen"/>
+        <a:font script="Armn" typeface="Arial"/>
+        <a:font script="Bugi" typeface="Leelawadee UI"/>
+        <a:font script="Bopo" typeface="Microsoft JhengHei"/>
+        <a:font script="Java" typeface="Javanese Text"/>
+        <a:font script="Lisu" typeface="Segoe UI"/>
+        <a:font script="Mymr" typeface="Myanmar Text"/>
+        <a:font script="Nkoo" typeface="Ebrima"/>
+        <a:font script="Olck" typeface="Nirmala UI"/>
+        <a:font script="Osma" typeface="Ebrima"/>
+        <a:font script="Phag" typeface="Phagspa"/>
+        <a:font script="Syrn" typeface="Estrangelo Edessa"/>
+        <a:font script="Syrj" typeface="Estrangelo Edessa"/>
+        <a:font script="Syre" typeface="Estrangelo Edessa"/>
+        <a:font script="Sora" typeface="Nirmala UI"/>
+        <a:font script="Tale" typeface="Microsoft Tai Le"/>
+        <a:font script="Talu" typeface="Microsoft New Tai Lue"/>
+        <a:font script="Tfng" typeface="Ebrima"/>
+      </a:majorFont>
+      <a:minorFont>
+        <a:latin typeface="Aptos" panose="02110004020202020204"/>
+        <a:ea typeface=""/>
+        <a:cs typeface=""/>
+        <a:font script="Jpan" typeface="游ゴシック"/>
+        <a:font script="Hang" typeface="맑은 고딕"/>
+        <a:font script="Hans" typeface="等线"/>
+        <a:font script="Hant" typeface="新細明體"/>
+        <a:font script="Arab" typeface="Arial"/>
+        <a:font script="Hebr" typeface="Arial"/>
+        <a:font script="Thai" typeface="Cordia New"/>
+        <a:font script="Ethi" typeface="Nyala"/>
+        <a:font script="Beng" typeface="Vrinda"/>
+        <a:font script="Gujr" typeface="Shruti"/>
+        <a:font script="Khmr" typeface="DaunPenh"/>
+        <a:font script="Knda" typeface="Tunga"/>
+        <a:font script="Guru" typeface="Raavi"/>
+        <a:font script="Cans" typeface="Euphemia"/>
+        <a:font script="Cher" typeface="Plantagenet Cherokee"/>
+        <a:font script="Yiii" typeface="Microsoft Yi Baiti"/>
+        <a:font script="Tibt" typeface="Microsoft Himalaya"/>
+        <a:font script="Thaa" typeface="MV Boli"/>
+        <a:font script="Deva" typeface="Mangal"/>
+        <a:font script="Telu" typeface="Gautami"/>
+        <a:font script="Taml" typeface="Latha"/>
+        <a:font script="Syrc" typeface="Estrangelo Edessa"/>
+        <a:font script="Orya" typeface="Kalinga"/>
+        <a:font script="Mlym" typeface="Kartika"/>
+        <a:font script="Laoo" typeface="DokChampa"/>
+        <a:font script="Sinh" typeface="Iskoola Pota"/>
+        <a:font script="Mong" typeface="Mongolian Baiti"/>
+        <a:font script="Viet" typeface="Arial"/>
+        <a:font script="Uigh" typeface="Microsoft Uighur"/>
+        <a:font script="Geor" typeface="Sylfaen"/>
+        <a:font script="Armn" typeface="Arial"/>
+        <a:font script="Bugi" typeface="Leelawadee UI"/>
+        <a:font script="Bopo" typeface="Microsoft JhengHei"/>
+        <a:font script="Java" typeface="Javanese Text"/>
+        <a:font script="Lisu" typeface="Segoe UI"/>
+        <a:font script="Mymr" typeface="Myanmar Text"/>
+        <a:font script="Nkoo" typeface="Ebrima"/>
+        <a:font script="Olck" typeface="Nirmala UI"/>
+        <a:font script="Osma" typeface="Ebrima"/>
+        <a:font script="Phag" typeface="Phagspa"/>
+        <a:font script="Syrn" typeface="Estrangelo Edessa"/>
+        <a:font script="Syrj" typeface="Estrangelo Edessa"/>
+        <a:font script="Syre" typeface="Estrangelo Edessa"/>
+        <a:font script="Sora" typeface="Nirmala UI"/>
+        <a:font script="Tale" typeface="Microsoft Tai Le"/>
+        <a:font script="Talu" typeface="Microsoft New Tai Lue"/>
+        <a:font script="Tfng" typeface="Ebrima"/>
+      </a:minorFont>
+    </a:fontScheme>
+    <a:fmtScheme name="Office">
+      <a:fillStyleLst>
+        <a:solidFill>
+          <a:schemeClr val="phClr"/>
+        </a:solidFill>
+        <a:gradFill rotWithShape="1">
+          <a:gsLst>
+            <a:gs pos="0">
+              <a:schemeClr val="phClr">
+                <a:lumMod val="110000"/>
+                <a:satMod val="105000"/>
+                <a:tint val="67000"/>
+              </a:schemeClr>
+            </a:gs>
+            <a:gs pos="50000">
+              <a:schemeClr val="phClr">
+                <a:lumMod val="105000"/>
+                <a:satMod val="103000"/>
+                <a:tint val="73000"/>
+              </a:schemeClr>
+            </a:gs>
+            <a:gs pos="100000">
+              <a:schemeClr val="phClr">
+                <a:lumMod val="105000"/>
+                <a:satMod val="109000"/>
+                <a:tint val="81000"/>
+              </a:schemeClr>
+            </a:gs>
+          </a:gsLst>
+          <a:lin ang="5400000" scaled="0"/>
+        </a:gradFill>
+        <a:gradFill rotWithShape="1">
+          <a:gsLst>
+            <a:gs pos="0">
+              <a:schemeClr val="phClr">
+                <a:satMod val="103000"/>
+                <a:lumMod val="102000"/>
+                <a:tint val="94000"/>
+              </a:schemeClr>
+            </a:gs>
+            <a:gs pos="50000">
+              <a:schemeClr val="phClr">
+                <a:satMod val="110000"/>
+                <a:lumMod val="100000"/>
+                <a:shade val="100000"/>
+              </a:schemeClr>
+            </a:gs>
+            <a:gs pos="100000">
+              <a:schemeClr val="phClr">
+                <a:lumMod val="99000"/>
+                <a:satMod val="120000"/>
+                <a:shade val="78000"/>
+              </a:schemeClr>
+            </a:gs>
+          </a:gsLst>
+          <a:lin ang="5400000" scaled="0"/>
+        </a:gradFill>
+      </a:fillStyleLst>
+      <a:lnStyleLst>
+        <a:ln w="12700" cap="flat" cmpd="sng" algn="ctr">
+          <a:solidFill>
+            <a:schemeClr val="phClr"/>
+          </a:solidFill>
+          <a:prstDash val="solid"/>
+          <a:miter lim="800000"/>
+        </a:ln>
+        <a:ln w="19050" cap="flat" cmpd="sng" algn="ctr">
+          <a:solidFill>
+            <a:schemeClr val="phClr"/>
+          </a:solidFill>
+          <a:prstDash val="solid"/>
+          <a:miter lim="800000"/>
+        </a:ln>
+        <a:ln w="25400" cap="flat" cmpd="sng" algn="ctr">
+          <a:solidFill>
+            <a:schemeClr val="phClr"/>
+          </a:solidFill>
+          <a:prstDash val="solid"/>
+          <a:miter lim="800000"/>
+        </a:ln>
+      </a:lnStyleLst>
+      <a:effectStyleLst>
+        <a:effectStyle>
+          <a:effectLst/>
+        </a:effectStyle>
+        <a:effectStyle>
+          <a:effectLst/>
+        </a:effectStyle>
+        <a:effectStyle>
+          <a:effectLst>
+            <a:outerShdw blurRad="57150" dist="19050" dir="5400000" algn="ctr" rotWithShape="0">
+              <a:srgbClr val="000000">
+                <a:alpha val="63000"/>
+              </a:srgbClr>
+            </a:outerShdw>
+          </a:effectLst>
+        </a:effectStyle>
+      </a:effectStyleLst>
+      <a:bgFillStyleLst>
+        <a:solidFill>
+          <a:schemeClr val="phClr"/>
+        </a:solidFill>
+        <a:solidFill>
+          <a:schemeClr val="phClr">
+            <a:tint val="95000"/>
+            <a:satMod val="170000"/>
+          </a:schemeClr>
+        </a:solidFill>
+        <a:gradFill rotWithShape="1">
+          <a:gsLst>
+            <a:gs pos="0">
+              <a:schemeClr val="phClr">
+                <a:tint val="93000"/>
+                <a:satMod val="150000"/>
+                <a:shade val="98000"/>
+                <a:lumMod val="102000"/>
+              </a:schemeClr>
+            </a:gs>
+            <a:gs pos="50000">
+              <a:schemeClr val="phClr">
+                <a:tint val="98000"/>
+                <a:satMod val="130000"/>
+                <a:shade val="90000"/>
+                <a:lumMod val="103000"/>
+              </a:schemeClr>
+            </a:gs>
+            <a:gs pos="100000">
+              <a:schemeClr val="phClr">
+                <a:shade val="63000"/>
+                <a:satMod val="120000"/>
+              </a:schemeClr>
+            </a:gs>
+          </a:gsLst>
+          <a:lin ang="5400000" scaled="0"/>
+        </a:gradFill>
+      </a:bgFillStyleLst>
+    </a:fmtScheme>
+  </a:themeElements>
+  <a:objectDefaults>
+    <a:lnDef>
+      <a:spPr/>
+      <a:bodyPr/>
+      <a:lstStyle/>
+      <a:style>
+        <a:lnRef idx="2">
+          <a:schemeClr val="accent1"/>
+        </a:lnRef>
+        <a:fillRef idx="0">
+          <a:schemeClr val="accent1"/>
+        </a:fillRef>
+        <a:effectRef idx="1">
+          <a:schemeClr val="accent1"/>
+        </a:effectRef>
+        <a:fontRef idx="minor">
+          <a:schemeClr val="tx1"/>
+        </a:fontRef>
+      </a:style>
+    </a:lnDef>
+  </a:objectDefaults>
+  <a:extraClrSchemeLst/>
+  <a:extLst>
+    <a:ext uri="{05A4C25C-085E-4340-85A3-A5531E510DB2}">
+      <thm15:themeFamily xmlns:thm15="http://schemas.microsoft.com/office/thememl/2012/main" name="Office Theme" id="{2E142A2C-CD16-42D6-873A-C26D2A0506FA}" vid="{1BDDFF52-6CD6-40A5-AB3C-68EB2F1E4D0A}"/>
+    </a:ext>
+  </a:extLst>
+</a:theme>
 </file>